--- a/curso/pptx/S03.pptx
+++ b/curso/pptx/S03.pptx
@@ -3891,8 +3891,8 @@
         </p:nvSpPr>
         <p:spPr>
           <a:xfrm>
-            <a:off x="640000" y="420000"/>
-            <a:ext cx="10912000" cy="420000"/>
+            <a:off x="10652000" y="380000"/>
+            <a:ext cx="900000" cy="800000"/>
           </a:xfrm>
           <a:prstGeom prst="rect">
             <a:avLst/>
@@ -3907,17 +3907,17 @@
           <a:p>
             <a:pPr>
               <a:spcAft>
-                <a:spcPts val="810"/>
+                <a:spcPts val="1980"/>
               </a:spcAft>
             </a:pPr>
             <a:r>
-              <a:rPr sz="1800" b="1">
+              <a:rPr sz="4400" b="0">
                 <a:solidFill>
                   <a:srgbClr val="1F2A44"/>
                 </a:solidFill>
                 <a:latin typeface="Nunito Sans"/>
               </a:rPr>
-              <a:t>🦉 Aula de Filosofía</a:t>
+              <a:t>🙃</a:t>
             </a:r>
           </a:p>
         </p:txBody>

--- a/curso/pptx/S03.pptx
+++ b/curso/pptx/S03.pptx
@@ -472,426 +472,6 @@
     </a:lvl9pPr>
   </p:notesStyle>
 </p:notesMaster>
-</file>
-
-<file path=ppt/notesSlides/notesSlide1.xml><?xml version="1.0" encoding="utf-8"?>
-<p:notes xmlns:a="http://schemas.openxmlformats.org/drawingml/2006/main" xmlns:p="http://schemas.openxmlformats.org/presentationml/2006/main" xmlns:r="http://schemas.openxmlformats.org/officeDocument/2006/relationships">
-  <p:cSld>
-    <p:spTree>
-      <p:nvGrpSpPr>
-        <p:cNvPr id="1" name=""/>
-        <p:cNvGrpSpPr/>
-        <p:nvPr/>
-      </p:nvGrpSpPr>
-      <p:grpSpPr>
-        <a:xfrm>
-          <a:off x="0" y="0"/>
-          <a:ext cx="0" cy="0"/>
-          <a:chOff x="0" y="0"/>
-          <a:chExt cx="0" cy="0"/>
-        </a:xfrm>
-      </p:grpSpPr>
-      <p:sp>
-        <p:nvSpPr>
-          <p:cNvPr id="2" name="Slide Image Placeholder 1"/>
-          <p:cNvSpPr>
-            <a:spLocks noGrp="1"/>
-          </p:cNvSpPr>
-          <p:nvPr>
-            <p:ph type="sldImg" idx="2"/>
-          </p:nvPr>
-        </p:nvSpPr>
-        <p:spPr/>
-      </p:sp>
-      <p:sp>
-        <p:nvSpPr>
-          <p:cNvPr id="3" name="Notes Placeholder 2"/>
-          <p:cNvSpPr>
-            <a:spLocks noGrp="1"/>
-          </p:cNvSpPr>
-          <p:nvPr>
-            <p:ph type="body" idx="3" sz="quarter"/>
-          </p:nvPr>
-        </p:nvSpPr>
-        <p:spPr/>
-        <p:txBody>
-          <a:bodyPr/>
-          <a:lstStyle/>
-          <a:p>
-            <a:r>
-              <a:t>3 minutos. Sin apuntes. Es para recordar, no cuenta para nota.</a:t>
-            </a:r>
-          </a:p>
-        </p:txBody>
-      </p:sp>
-      <p:sp>
-        <p:nvSpPr>
-          <p:cNvPr id="4" name="Slide Number Placeholder 3"/>
-          <p:cNvSpPr>
-            <a:spLocks noGrp="1"/>
-          </p:cNvSpPr>
-          <p:nvPr>
-            <p:ph type="sldNum" idx="5" sz="quarter"/>
-          </p:nvPr>
-        </p:nvSpPr>
-        <p:spPr/>
-      </p:sp>
-    </p:spTree>
-  </p:cSld>
-  <p:clrMapOvr>
-    <a:masterClrMapping/>
-  </p:clrMapOvr>
-</p:notes>
-</file>
-
-<file path=ppt/notesSlides/notesSlide2.xml><?xml version="1.0" encoding="utf-8"?>
-<p:notes xmlns:a="http://schemas.openxmlformats.org/drawingml/2006/main" xmlns:p="http://schemas.openxmlformats.org/presentationml/2006/main" xmlns:r="http://schemas.openxmlformats.org/officeDocument/2006/relationships">
-  <p:cSld>
-    <p:spTree>
-      <p:nvGrpSpPr>
-        <p:cNvPr id="1" name=""/>
-        <p:cNvGrpSpPr/>
-        <p:nvPr/>
-      </p:nvGrpSpPr>
-      <p:grpSpPr>
-        <a:xfrm>
-          <a:off x="0" y="0"/>
-          <a:ext cx="0" cy="0"/>
-          <a:chOff x="0" y="0"/>
-          <a:chExt cx="0" cy="0"/>
-        </a:xfrm>
-      </p:grpSpPr>
-      <p:sp>
-        <p:nvSpPr>
-          <p:cNvPr id="2" name="Slide Image Placeholder 1"/>
-          <p:cNvSpPr>
-            <a:spLocks noGrp="1"/>
-          </p:cNvSpPr>
-          <p:nvPr>
-            <p:ph type="sldImg" idx="2"/>
-          </p:nvPr>
-        </p:nvSpPr>
-        <p:spPr/>
-      </p:sp>
-      <p:sp>
-        <p:nvSpPr>
-          <p:cNvPr id="3" name="Notes Placeholder 2"/>
-          <p:cNvSpPr>
-            <a:spLocks noGrp="1"/>
-          </p:cNvSpPr>
-          <p:nvPr>
-            <p:ph type="body" idx="3" sz="quarter"/>
-          </p:nvPr>
-        </p:nvSpPr>
-        <p:spPr/>
-        <p:txBody>
-          <a:bodyPr/>
-          <a:lstStyle/>
-          <a:p>
-            <a:r>
-              <a:t>3 minutos. Sin apuntes. Es para recordar, no cuenta para nota.</a:t>
-            </a:r>
-          </a:p>
-        </p:txBody>
-      </p:sp>
-      <p:sp>
-        <p:nvSpPr>
-          <p:cNvPr id="4" name="Slide Number Placeholder 3"/>
-          <p:cNvSpPr>
-            <a:spLocks noGrp="1"/>
-          </p:cNvSpPr>
-          <p:nvPr>
-            <p:ph type="sldNum" idx="5" sz="quarter"/>
-          </p:nvPr>
-        </p:nvSpPr>
-        <p:spPr/>
-      </p:sp>
-    </p:spTree>
-  </p:cSld>
-  <p:clrMapOvr>
-    <a:masterClrMapping/>
-  </p:clrMapOvr>
-</p:notes>
-</file>
-
-<file path=ppt/notesSlides/notesSlide3.xml><?xml version="1.0" encoding="utf-8"?>
-<p:notes xmlns:a="http://schemas.openxmlformats.org/drawingml/2006/main" xmlns:p="http://schemas.openxmlformats.org/presentationml/2006/main" xmlns:r="http://schemas.openxmlformats.org/officeDocument/2006/relationships">
-  <p:cSld>
-    <p:spTree>
-      <p:nvGrpSpPr>
-        <p:cNvPr id="1" name=""/>
-        <p:cNvGrpSpPr/>
-        <p:nvPr/>
-      </p:nvGrpSpPr>
-      <p:grpSpPr>
-        <a:xfrm>
-          <a:off x="0" y="0"/>
-          <a:ext cx="0" cy="0"/>
-          <a:chOff x="0" y="0"/>
-          <a:chExt cx="0" cy="0"/>
-        </a:xfrm>
-      </p:grpSpPr>
-      <p:sp>
-        <p:nvSpPr>
-          <p:cNvPr id="2" name="Slide Image Placeholder 1"/>
-          <p:cNvSpPr>
-            <a:spLocks noGrp="1"/>
-          </p:cNvSpPr>
-          <p:nvPr>
-            <p:ph type="sldImg" idx="2"/>
-          </p:nvPr>
-        </p:nvSpPr>
-        <p:spPr/>
-      </p:sp>
-      <p:sp>
-        <p:nvSpPr>
-          <p:cNvPr id="3" name="Notes Placeholder 2"/>
-          <p:cNvSpPr>
-            <a:spLocks noGrp="1"/>
-          </p:cNvSpPr>
-          <p:nvPr>
-            <p:ph type="body" idx="3" sz="quarter"/>
-          </p:nvPr>
-        </p:nvSpPr>
-        <p:spPr/>
-        <p:txBody>
-          <a:bodyPr/>
-          <a:lstStyle/>
-          <a:p>
-            <a:r>
-              <a:t>Nadie tiene que contestar: solo pensarlo.</a:t>
-            </a:r>
-          </a:p>
-        </p:txBody>
-      </p:sp>
-      <p:sp>
-        <p:nvSpPr>
-          <p:cNvPr id="4" name="Slide Number Placeholder 3"/>
-          <p:cNvSpPr>
-            <a:spLocks noGrp="1"/>
-          </p:cNvSpPr>
-          <p:nvPr>
-            <p:ph type="sldNum" idx="5" sz="quarter"/>
-          </p:nvPr>
-        </p:nvSpPr>
-        <p:spPr/>
-      </p:sp>
-    </p:spTree>
-  </p:cSld>
-  <p:clrMapOvr>
-    <a:masterClrMapping/>
-  </p:clrMapOvr>
-</p:notes>
-</file>
-
-<file path=ppt/notesSlides/notesSlide4.xml><?xml version="1.0" encoding="utf-8"?>
-<p:notes xmlns:a="http://schemas.openxmlformats.org/drawingml/2006/main" xmlns:p="http://schemas.openxmlformats.org/presentationml/2006/main" xmlns:r="http://schemas.openxmlformats.org/officeDocument/2006/relationships">
-  <p:cSld>
-    <p:spTree>
-      <p:nvGrpSpPr>
-        <p:cNvPr id="1" name=""/>
-        <p:cNvGrpSpPr/>
-        <p:nvPr/>
-      </p:nvGrpSpPr>
-      <p:grpSpPr>
-        <a:xfrm>
-          <a:off x="0" y="0"/>
-          <a:ext cx="0" cy="0"/>
-          <a:chOff x="0" y="0"/>
-          <a:chExt cx="0" cy="0"/>
-        </a:xfrm>
-      </p:grpSpPr>
-      <p:sp>
-        <p:nvSpPr>
-          <p:cNvPr id="2" name="Slide Image Placeholder 1"/>
-          <p:cNvSpPr>
-            <a:spLocks noGrp="1"/>
-          </p:cNvSpPr>
-          <p:nvPr>
-            <p:ph type="sldImg" idx="2"/>
-          </p:nvPr>
-        </p:nvSpPr>
-        <p:spPr/>
-      </p:sp>
-      <p:sp>
-        <p:nvSpPr>
-          <p:cNvPr id="3" name="Notes Placeholder 2"/>
-          <p:cNvSpPr>
-            <a:spLocks noGrp="1"/>
-          </p:cNvSpPr>
-          <p:nvPr>
-            <p:ph type="body" idx="3" sz="quarter"/>
-          </p:nvPr>
-        </p:nvSpPr>
-        <p:spPr/>
-        <p:txBody>
-          <a:bodyPr/>
-          <a:lstStyle/>
-          <a:p>
-            <a:r>
-              <a:t>Dejar unos segundos para que piensen la respuesta fácil antes de enseñar los pasos.</a:t>
-            </a:r>
-          </a:p>
-        </p:txBody>
-      </p:sp>
-      <p:sp>
-        <p:nvSpPr>
-          <p:cNvPr id="4" name="Slide Number Placeholder 3"/>
-          <p:cNvSpPr>
-            <a:spLocks noGrp="1"/>
-          </p:cNvSpPr>
-          <p:nvPr>
-            <p:ph type="sldNum" idx="5" sz="quarter"/>
-          </p:nvPr>
-        </p:nvSpPr>
-        <p:spPr/>
-      </p:sp>
-    </p:spTree>
-  </p:cSld>
-  <p:clrMapOvr>
-    <a:masterClrMapping/>
-  </p:clrMapOvr>
-</p:notes>
-</file>
-
-<file path=ppt/notesSlides/notesSlide5.xml><?xml version="1.0" encoding="utf-8"?>
-<p:notes xmlns:a="http://schemas.openxmlformats.org/drawingml/2006/main" xmlns:p="http://schemas.openxmlformats.org/presentationml/2006/main" xmlns:r="http://schemas.openxmlformats.org/officeDocument/2006/relationships">
-  <p:cSld>
-    <p:spTree>
-      <p:nvGrpSpPr>
-        <p:cNvPr id="1" name=""/>
-        <p:cNvGrpSpPr/>
-        <p:nvPr/>
-      </p:nvGrpSpPr>
-      <p:grpSpPr>
-        <a:xfrm>
-          <a:off x="0" y="0"/>
-          <a:ext cx="0" cy="0"/>
-          <a:chOff x="0" y="0"/>
-          <a:chExt cx="0" cy="0"/>
-        </a:xfrm>
-      </p:grpSpPr>
-      <p:sp>
-        <p:nvSpPr>
-          <p:cNvPr id="2" name="Slide Image Placeholder 1"/>
-          <p:cNvSpPr>
-            <a:spLocks noGrp="1"/>
-          </p:cNvSpPr>
-          <p:nvPr>
-            <p:ph type="sldImg" idx="2"/>
-          </p:nvPr>
-        </p:nvSpPr>
-        <p:spPr/>
-      </p:sp>
-      <p:sp>
-        <p:nvSpPr>
-          <p:cNvPr id="3" name="Notes Placeholder 2"/>
-          <p:cNvSpPr>
-            <a:spLocks noGrp="1"/>
-          </p:cNvSpPr>
-          <p:nvPr>
-            <p:ph type="body" idx="3" sz="quarter"/>
-          </p:nvPr>
-        </p:nvSpPr>
-        <p:spPr/>
-        <p:txBody>
-          <a:bodyPr/>
-          <a:lstStyle/>
-          <a:p>
-            <a:r>
-              <a:t>Dejar 2 minutos para que lo escriban. La diapositiva siguiente muestra el resumen.</a:t>
-            </a:r>
-          </a:p>
-        </p:txBody>
-      </p:sp>
-      <p:sp>
-        <p:nvSpPr>
-          <p:cNvPr id="4" name="Slide Number Placeholder 3"/>
-          <p:cNvSpPr>
-            <a:spLocks noGrp="1"/>
-          </p:cNvSpPr>
-          <p:nvPr>
-            <p:ph type="sldNum" idx="5" sz="quarter"/>
-          </p:nvPr>
-        </p:nvSpPr>
-        <p:spPr/>
-      </p:sp>
-    </p:spTree>
-  </p:cSld>
-  <p:clrMapOvr>
-    <a:masterClrMapping/>
-  </p:clrMapOvr>
-</p:notes>
-</file>
-
-<file path=ppt/notesSlides/notesSlide6.xml><?xml version="1.0" encoding="utf-8"?>
-<p:notes xmlns:a="http://schemas.openxmlformats.org/drawingml/2006/main" xmlns:p="http://schemas.openxmlformats.org/presentationml/2006/main" xmlns:r="http://schemas.openxmlformats.org/officeDocument/2006/relationships">
-  <p:cSld>
-    <p:spTree>
-      <p:nvGrpSpPr>
-        <p:cNvPr id="1" name=""/>
-        <p:cNvGrpSpPr/>
-        <p:nvPr/>
-      </p:nvGrpSpPr>
-      <p:grpSpPr>
-        <a:xfrm>
-          <a:off x="0" y="0"/>
-          <a:ext cx="0" cy="0"/>
-          <a:chOff x="0" y="0"/>
-          <a:chExt cx="0" cy="0"/>
-        </a:xfrm>
-      </p:grpSpPr>
-      <p:sp>
-        <p:nvSpPr>
-          <p:cNvPr id="2" name="Slide Image Placeholder 1"/>
-          <p:cNvSpPr>
-            <a:spLocks noGrp="1"/>
-          </p:cNvSpPr>
-          <p:nvPr>
-            <p:ph type="sldImg" idx="2"/>
-          </p:nvPr>
-        </p:nvSpPr>
-        <p:spPr/>
-      </p:sp>
-      <p:sp>
-        <p:nvSpPr>
-          <p:cNvPr id="3" name="Notes Placeholder 2"/>
-          <p:cNvSpPr>
-            <a:spLocks noGrp="1"/>
-          </p:cNvSpPr>
-          <p:nvPr>
-            <p:ph type="body" idx="3" sz="quarter"/>
-          </p:nvPr>
-        </p:nvSpPr>
-        <p:spPr/>
-        <p:txBody>
-          <a:bodyPr/>
-          <a:lstStyle/>
-          <a:p>
-            <a:r>
-              <a:t>Buscar: «creer y saber diferencia» · «qué es el conocimiento filosofía para jóvenes»</a:t>
-            </a:r>
-          </a:p>
-        </p:txBody>
-      </p:sp>
-      <p:sp>
-        <p:nvSpPr>
-          <p:cNvPr id="4" name="Slide Number Placeholder 3"/>
-          <p:cNvSpPr>
-            <a:spLocks noGrp="1"/>
-          </p:cNvSpPr>
-          <p:nvPr>
-            <p:ph type="sldNum" idx="5" sz="quarter"/>
-          </p:nvPr>
-        </p:nvSpPr>
-        <p:spPr/>
-      </p:sp>
-    </p:spTree>
-  </p:cSld>
-  <p:clrMapOvr>
-    <a:masterClrMapping/>
-  </p:clrMapOvr>
-</p:notes>
 </file>
 
 <file path=ppt/slideLayouts/slideLayout1.xml><?xml version="1.0" encoding="utf-8"?>

--- a/curso/pptx/S03.pptx
+++ b/curso/pptx/S03.pptx
@@ -3904,7 +3904,7 @@
                 </a:solidFill>
                 <a:latin typeface="Nunito Sans"/>
               </a:rPr>
-              <a:t>Omar está segurísimo: «Las llaves están en la mochila». No están. Al final aparecen en la mesa de la cocina.</a:t>
+              <a:t>Un chico está segurísimo: «Las llaves están en la mochila». No están. Al final aparecen en la mesa de la cocina.</a:t>
             </a:r>
           </a:p>
         </p:txBody>
@@ -4213,7 +4213,7 @@
                 </a:solidFill>
                 <a:latin typeface="Nunito Sans"/>
               </a:rPr>
-              <a:t>Aitor no ha estudiado. En una pregunta de test elige la b) al azar… y acierta.</a:t>
+              <a:t>Un chico no ha estudiado. En una pregunta de test elige la b) al azar… y acierta.</a:t>
             </a:r>
           </a:p>
         </p:txBody>
@@ -4522,7 +4522,7 @@
                 </a:solidFill>
                 <a:latin typeface="Nunito Sans"/>
               </a:rPr>
-              <a:t>Naiara dice: «El agua hierve a 100 grados a nivel del mar». Lo explicaron en clase y ella lo midió en el laboratorio.</a:t>
+              <a:t>Una chica dice: «El agua hierve a 100 grados a nivel del mar». Lo explicaron en clase y ella lo midió en el laboratorio.</a:t>
             </a:r>
           </a:p>
         </p:txBody>
@@ -4620,7 +4620,7 @@
                 </a:solidFill>
                 <a:latin typeface="Nunito Sans"/>
               </a:rPr>
-              <a:t>Conclusión: Naiara lo sabe. Es verdad y tiene buenas razones.</a:t>
+              <a:t>Conclusión: esa chica lo sabe. Es verdad y tiene buenas razones.</a:t>
             </a:r>
           </a:p>
         </p:txBody>
@@ -4806,7 +4806,7 @@
                 </a:solidFill>
                 <a:latin typeface="Nunito Sans"/>
               </a:rPr>
-              <a:t>Leire mira el reloj del pasillo: marca las 10:15. Son las 10:15. Pero el reloj está parado desde ayer a las 10:15.</a:t>
+              <a:t>Una chica mira el reloj del pasillo: marca las 10:15. Son las 10:15. Pero el reloj está parado desde ayer a las 10:15.</a:t>
             </a:r>
           </a:p>
         </p:txBody>
@@ -4854,7 +4854,7 @@
                 </a:solidFill>
                 <a:latin typeface="Nunito Sans"/>
               </a:rPr>
-              <a:t>¿Sabe Leire qué hora es?</a:t>
+              <a:t>¿Sabe esa chica qué hora es?</a:t>
             </a:r>
           </a:p>
           <a:p>
@@ -6532,7 +6532,7 @@
                 </a:solidFill>
                 <a:latin typeface="Nunito Sans"/>
               </a:rPr>
-              <a:t>Omar está segurísimo de que dejó las llaves en la mochila. Las busca… y no están.</a:t>
+              <a:t>Un chico está segurísimo de que dejó las llaves en la mochila. Las busca… y no están.</a:t>
             </a:r>
           </a:p>
         </p:txBody>
@@ -6571,7 +6571,7 @@
                 </a:solidFill>
                 <a:latin typeface="Nunito Sans"/>
               </a:rPr>
-              <a:t>¿Omar sabía dónde estaban las llaves, o solo lo creía?</a:t>
+              <a:t>¿Ese chico sabía dónde estaban las llaves, o solo lo creía?</a:t>
             </a:r>
           </a:p>
         </p:txBody>

--- a/curso/pptx/S03.pptx
+++ b/curso/pptx/S03.pptx
@@ -22,7 +22,6 @@
     <p:sldId id="270" r:id="rId22"/>
     <p:sldId id="271" r:id="rId23"/>
     <p:sldId id="272" r:id="rId24"/>
-    <p:sldId id="273" r:id="rId25"/>
   </p:sldIdLst>
   <p:sldSz cx="12192000" cy="6858000" type="screen4x3"/>
   <p:notesSz cx="6858000" cy="9144000"/>
@@ -3536,7 +3535,7 @@
                 </a:solidFill>
                 <a:latin typeface="Nunito Sans"/>
               </a:rPr>
-              <a:t>PENSAMIENTO CRÍTICO · SESIÓN 3 · UNIDAD 1 · PENSAR, CREER Y SABER</a:t>
+              <a:t>PENSAMIENTO CRÍTICO · SESIÓN 3 · UNIDAD 1 · PENSAR CRÍTICAMENTE</a:t>
             </a:r>
           </a:p>
         </p:txBody>
@@ -3575,7 +3574,7 @@
                 </a:solidFill>
                 <a:latin typeface="Fredoka"/>
               </a:rPr>
-              <a:t>Creer, saber y estar seguro</a:t>
+              <a:t>¿Por qué creemos lo que creemos?</a:t>
             </a:r>
           </a:p>
         </p:txBody>
@@ -3614,7 +3613,7 @@
                 </a:solidFill>
                 <a:latin typeface="Nunito Sans"/>
               </a:rPr>
-              <a:t>Sentirse seguro no es lo mismo que saber. Solemos decir que alguien sabe algo cuando lo cree, es verdad y tiene buenas razones.</a:t>
+              <a:t>Muchas creencias no vienen de razones, sino de la costumbre, el grupo, la autoridad o la emoción, como en el cuento del rey que cojeaba.</a:t>
             </a:r>
           </a:p>
         </p:txBody>
@@ -3633,7 +3632,7 @@
     <p:bg>
       <p:bgPr>
         <a:solidFill>
-          <a:srgbClr val="1F2A44"/>
+          <a:srgbClr val="FBF7EF"/>
         </a:solidFill>
         <a:effectLst/>
       </p:bgPr>
@@ -3653,8 +3652,8 @@
         </p:nvSpPr>
         <p:spPr>
           <a:xfrm>
-            <a:off x="640000" y="2300000"/>
-            <a:ext cx="10912000" cy="500000"/>
+            <a:off x="640000" y="380000"/>
+            <a:ext cx="10912000" cy="420000"/>
           </a:xfrm>
           <a:prstGeom prst="rect">
             <a:avLst/>
@@ -3669,17 +3668,17 @@
           <a:p>
             <a:pPr>
               <a:spcAft>
-                <a:spcPts val="810"/>
-              </a:spcAft>
-            </a:pPr>
-            <a:r>
-              <a:rPr sz="1800" b="1">
-                <a:solidFill>
-                  <a:srgbClr val="F4B183"/>
-                </a:solidFill>
-                <a:latin typeface="Nunito Sans"/>
-              </a:rPr>
-              <a:t>BLOQUE 2</a:t>
+                <a:spcPts val="630"/>
+              </a:spcAft>
+            </a:pPr>
+            <a:r>
+              <a:rPr sz="1400" b="1">
+                <a:solidFill>
+                  <a:srgbClr val="E8793A"/>
+                </a:solidFill>
+                <a:latin typeface="Nunito Sans"/>
+              </a:rPr>
+              <a:t>BLOQUE 2 · EL REY QUE COJEABA</a:t>
             </a:r>
           </a:p>
         </p:txBody>
@@ -3692,7 +3691,7 @@
         </p:nvSpPr>
         <p:spPr>
           <a:xfrm>
-            <a:off x="640000" y="2800000"/>
+            <a:off x="640000" y="760000"/>
             <a:ext cx="10912000" cy="800000"/>
           </a:xfrm>
           <a:prstGeom prst="rect">
@@ -3708,17 +3707,276 @@
           <a:p>
             <a:pPr>
               <a:spcAft>
-                <a:spcPts val="2160"/>
-              </a:spcAft>
-            </a:pPr>
-            <a:r>
-              <a:rPr sz="4800" b="1">
-                <a:solidFill>
-                  <a:srgbClr val="FBF7EF"/>
+                <a:spcPts val="1710"/>
+              </a:spcAft>
+            </a:pPr>
+            <a:r>
+              <a:rPr sz="3800" b="1">
+                <a:solidFill>
+                  <a:srgbClr val="1F2A44"/>
                 </a:solidFill>
                 <a:latin typeface="Fredoka"/>
               </a:rPr>
-              <a:t>Casos resueltos</a:t>
+              <a:t>El cuento (1) · Todo el palacio cojea</a:t>
+            </a:r>
+          </a:p>
+        </p:txBody>
+      </p:sp>
+      <p:sp>
+        <p:nvSpPr>
+          <p:cNvPr id="4" name="Rectangle 3"/>
+          <p:cNvSpPr/>
+          <p:nvPr/>
+        </p:nvSpPr>
+        <p:spPr>
+          <a:xfrm>
+            <a:off x="640000" y="1600000"/>
+            <a:ext cx="10912000" cy="1100000"/>
+          </a:xfrm>
+          <a:prstGeom prst="rect">
+            <a:avLst/>
+          </a:prstGeom>
+          <a:solidFill>
+            <a:srgbClr val="FFFFFF"/>
+          </a:solidFill>
+          <a:ln>
+            <a:noFill/>
+          </a:ln>
+        </p:spPr>
+        <p:style>
+          <a:lnRef idx="1">
+            <a:schemeClr val="accent1"/>
+          </a:lnRef>
+          <a:fillRef idx="3">
+            <a:schemeClr val="accent1"/>
+          </a:fillRef>
+          <a:effectRef idx="2">
+            <a:schemeClr val="accent1"/>
+          </a:effectRef>
+          <a:fontRef idx="minor">
+            <a:schemeClr val="lt1"/>
+          </a:fontRef>
+        </p:style>
+        <p:txBody>
+          <a:bodyPr rtlCol="0" anchor="ctr"/>
+          <a:lstStyle/>
+          <a:p>
+            <a:pPr algn="ctr"/>
+          </a:p>
+        </p:txBody>
+      </p:sp>
+      <p:sp>
+        <p:nvSpPr>
+          <p:cNvPr id="5" name="TextBox 4"/>
+          <p:cNvSpPr txBox="1"/>
+          <p:nvPr/>
+        </p:nvSpPr>
+        <p:spPr>
+          <a:xfrm>
+            <a:off x="840000" y="1650000"/>
+            <a:ext cx="10512000" cy="1000000"/>
+          </a:xfrm>
+          <a:prstGeom prst="rect">
+            <a:avLst/>
+          </a:prstGeom>
+          <a:noFill/>
+        </p:spPr>
+        <p:txBody>
+          <a:bodyPr wrap="square" anchor="ctr">
+            <a:spAutoFit/>
+          </a:bodyPr>
+          <a:lstStyle/>
+          <a:p>
+            <a:pPr>
+              <a:spcAft>
+                <a:spcPts val="1170"/>
+              </a:spcAft>
+            </a:pPr>
+            <a:r>
+              <a:rPr sz="2600" b="1">
+                <a:solidFill>
+                  <a:srgbClr val="1F2A44"/>
+                </a:solidFill>
+                <a:latin typeface="Nunito Sans"/>
+              </a:rPr>
+              <a:t>Había una vez un rey que era cojo. Sus cortesanos, para caerle bien, empezaron a cojear. Pronto cojeaba todo el palacio: ministros, guardias, cocineros… Nadie caminaba recto.</a:t>
+            </a:r>
+          </a:p>
+        </p:txBody>
+      </p:sp>
+      <p:sp>
+        <p:nvSpPr>
+          <p:cNvPr id="6" name="TextBox 5"/>
+          <p:cNvSpPr txBox="1"/>
+          <p:nvPr/>
+        </p:nvSpPr>
+        <p:spPr>
+          <a:xfrm>
+            <a:off x="640000" y="2900000"/>
+            <a:ext cx="10912000" cy="3500000"/>
+          </a:xfrm>
+          <a:prstGeom prst="rect">
+            <a:avLst/>
+          </a:prstGeom>
+          <a:noFill/>
+        </p:spPr>
+        <p:txBody>
+          <a:bodyPr wrap="square">
+            <a:spAutoFit/>
+          </a:bodyPr>
+          <a:lstStyle/>
+          <a:p>
+            <a:pPr>
+              <a:spcAft>
+                <a:spcPts val="1080"/>
+              </a:spcAft>
+            </a:pPr>
+            <a:r>
+              <a:rPr sz="2400" b="1">
+                <a:solidFill>
+                  <a:srgbClr val="E8793A"/>
+                </a:solidFill>
+                <a:latin typeface="Nunito Sans"/>
+              </a:rPr>
+              <a:t>1. </a:t>
+            </a:r>
+            <a:r>
+              <a:rPr sz="2400" b="0">
+                <a:solidFill>
+                  <a:srgbClr val="1F2A44"/>
+                </a:solidFill>
+                <a:latin typeface="Nunito Sans"/>
+              </a:rPr>
+              <a:t>¿Por qué cojeaban? No les dolía nada.</a:t>
+            </a:r>
+          </a:p>
+          <a:p>
+            <a:pPr>
+              <a:spcAft>
+                <a:spcPts val="1080"/>
+              </a:spcAft>
+            </a:pPr>
+            <a:r>
+              <a:rPr sz="2400" b="1">
+                <a:solidFill>
+                  <a:srgbClr val="E8793A"/>
+                </a:solidFill>
+                <a:latin typeface="Nunito Sans"/>
+              </a:rPr>
+              <a:t>2. </a:t>
+            </a:r>
+            <a:r>
+              <a:rPr sz="2400" b="0">
+                <a:solidFill>
+                  <a:srgbClr val="1F2A44"/>
+                </a:solidFill>
+                <a:latin typeface="Nunito Sans"/>
+              </a:rPr>
+              <a:t>Al principio, para agradar a la </a:t>
+            </a:r>
+            <a:r>
+              <a:rPr sz="2400" b="1">
+                <a:solidFill>
+                  <a:srgbClr val="1F2A44"/>
+                </a:solidFill>
+                <a:latin typeface="Nunito Sans"/>
+              </a:rPr>
+              <a:t>autoridad</a:t>
+            </a:r>
+            <a:r>
+              <a:rPr sz="2400" b="0">
+                <a:solidFill>
+                  <a:srgbClr val="1F2A44"/>
+                </a:solidFill>
+                <a:latin typeface="Nunito Sans"/>
+              </a:rPr>
+              <a:t>: el rey.</a:t>
+            </a:r>
+          </a:p>
+          <a:p>
+            <a:pPr>
+              <a:spcAft>
+                <a:spcPts val="1080"/>
+              </a:spcAft>
+            </a:pPr>
+            <a:r>
+              <a:rPr sz="2400" b="1">
+                <a:solidFill>
+                  <a:srgbClr val="E8793A"/>
+                </a:solidFill>
+                <a:latin typeface="Nunito Sans"/>
+              </a:rPr>
+              <a:t>3. </a:t>
+            </a:r>
+            <a:r>
+              <a:rPr sz="2400" b="0">
+                <a:solidFill>
+                  <a:srgbClr val="1F2A44"/>
+                </a:solidFill>
+                <a:latin typeface="Nunito Sans"/>
+              </a:rPr>
+              <a:t>Después, porque lo hacían todos: el </a:t>
+            </a:r>
+            <a:r>
+              <a:rPr sz="2400" b="1">
+                <a:solidFill>
+                  <a:srgbClr val="1F2A44"/>
+                </a:solidFill>
+                <a:latin typeface="Nunito Sans"/>
+              </a:rPr>
+              <a:t>grupo</a:t>
+            </a:r>
+            <a:r>
+              <a:rPr sz="2400" b="0">
+                <a:solidFill>
+                  <a:srgbClr val="1F2A44"/>
+                </a:solidFill>
+                <a:latin typeface="Nunito Sans"/>
+              </a:rPr>
+              <a:t>. Y al final ya era </a:t>
+            </a:r>
+            <a:r>
+              <a:rPr sz="2400" b="1">
+                <a:solidFill>
+                  <a:srgbClr val="1F2A44"/>
+                </a:solidFill>
+                <a:latin typeface="Nunito Sans"/>
+              </a:rPr>
+              <a:t>costumbre</a:t>
+            </a:r>
+            <a:r>
+              <a:rPr sz="2400" b="0">
+                <a:solidFill>
+                  <a:srgbClr val="1F2A44"/>
+                </a:solidFill>
+                <a:latin typeface="Nunito Sans"/>
+              </a:rPr>
+              <a:t>.</a:t>
+            </a:r>
+          </a:p>
+          <a:p>
+            <a:pPr>
+              <a:spcAft>
+                <a:spcPts val="1080"/>
+              </a:spcAft>
+            </a:pPr>
+            <a:r>
+              <a:rPr sz="2400" b="1">
+                <a:solidFill>
+                  <a:srgbClr val="E8793A"/>
+                </a:solidFill>
+                <a:latin typeface="Nunito Sans"/>
+              </a:rPr>
+              <a:t>4. </a:t>
+            </a:r>
+            <a:r>
+              <a:rPr sz="2400" b="0">
+                <a:solidFill>
+                  <a:srgbClr val="1F2A44"/>
+                </a:solidFill>
+                <a:latin typeface="Nunito Sans"/>
+              </a:rPr>
+              <a:t>Conclusión: nadie tenía una buena razón para cojear.</a:t>
             </a:r>
           </a:p>
         </p:txBody>
@@ -3783,7 +4041,7 @@
                 </a:solidFill>
                 <a:latin typeface="Nunito Sans"/>
               </a:rPr>
-              <a:t>BLOQUE 2 · CASOS RESUELTOS</a:t>
+              <a:t>BLOQUE 2 · EL REY QUE COJEABA</a:t>
             </a:r>
           </a:p>
         </p:txBody>
@@ -3822,7 +4080,7 @@
                 </a:solidFill>
                 <a:latin typeface="Fredoka"/>
               </a:rPr>
-              <a:t>Caso 1 · Las llaves</a:t>
+              <a:t>El cuento (2) · El caballero</a:t>
             </a:r>
           </a:p>
         </p:txBody>
@@ -3904,7 +4162,7 @@
                 </a:solidFill>
                 <a:latin typeface="Nunito Sans"/>
               </a:rPr>
-              <a:t>Un chico está segurísimo: «Las llaves están en la mochila». No están. Al final aparecen en la mesa de la cocina.</a:t>
+              <a:t>Llega un caballero de fuera que camina recto. Todos se ríen. El rey se enfada. El caballero dice: «Majestad, cojeo de los dos pies a la vez».</a:t>
             </a:r>
           </a:p>
         </p:txBody>
@@ -3952,7 +4210,7 @@
                 </a:solidFill>
                 <a:latin typeface="Nunito Sans"/>
               </a:rPr>
-              <a:t>¿Estaba seguro? Sí, muchísimo.</a:t>
+              <a:t>¿Por qué se ríen? Porque es distinto al grupo, no porque haga algo mal.</a:t>
             </a:r>
           </a:p>
           <a:p>
@@ -3977,7 +4235,25 @@
                 </a:solidFill>
                 <a:latin typeface="Nunito Sans"/>
               </a:rPr>
-              <a:t>¿Era verdad lo que creía? No: estaban en la cocina.</a:t>
+              <a:t>Aquí actúa la </a:t>
+            </a:r>
+            <a:r>
+              <a:rPr sz="2400" b="1">
+                <a:solidFill>
+                  <a:srgbClr val="1F2A44"/>
+                </a:solidFill>
+                <a:latin typeface="Nunito Sans"/>
+              </a:rPr>
+              <a:t>emoción</a:t>
+            </a:r>
+            <a:r>
+              <a:rPr sz="2400" b="0">
+                <a:solidFill>
+                  <a:srgbClr val="1F2A44"/>
+                </a:solidFill>
+                <a:latin typeface="Nunito Sans"/>
+              </a:rPr>
+              <a:t>: la burla y el miedo a quedar mal.</a:t>
             </a:r>
           </a:p>
           <a:p>
@@ -4002,7 +4278,7 @@
                 </a:solidFill>
                 <a:latin typeface="Nunito Sans"/>
               </a:rPr>
-              <a:t>Entonces, ¿lo sabía? No. Solo lo creía, y con mucha fuerza.</a:t>
+              <a:t>Su respuesta es ingeniosa: se burla de la costumbre y a la vez se libra del castigo.</a:t>
             </a:r>
           </a:p>
           <a:p>
@@ -4027,7 +4303,7 @@
                 </a:solidFill>
                 <a:latin typeface="Nunito Sans"/>
               </a:rPr>
-              <a:t>Conclusión: sentirse seguro no es lo mismo que saber.</a:t>
+              <a:t>Conclusión: el único que camina bien parece el raro. Lo normal no siempre es lo razonable.</a:t>
             </a:r>
           </a:p>
         </p:txBody>
@@ -4092,7 +4368,7 @@
                 </a:solidFill>
                 <a:latin typeface="Nunito Sans"/>
               </a:rPr>
-              <a:t>BLOQUE 2 · CASOS RESUELTOS</a:t>
+              <a:t>BLOQUE 2 · EL REY QUE COJEABA</a:t>
             </a:r>
           </a:p>
         </p:txBody>
@@ -4131,7 +4407,7 @@
                 </a:solidFill>
                 <a:latin typeface="Fredoka"/>
               </a:rPr>
-              <a:t>Caso 2 · Acertar por suerte</a:t>
+              <a:t>Caso de hoy · Una crema para granos</a:t>
             </a:r>
           </a:p>
         </p:txBody>
@@ -4213,7 +4489,7 @@
                 </a:solidFill>
                 <a:latin typeface="Nunito Sans"/>
               </a:rPr>
-              <a:t>Un chico no ha estudiado. En una pregunta de test elige la b) al azar… y acierta.</a:t>
+              <a:t>Una chica cree que una crema para granos funciona. La usa toda su cuadrilla, la anuncia su influencer favorita y a ella le hace mucha ilusión.</a:t>
             </a:r>
           </a:p>
         </p:txBody>
@@ -4261,7 +4537,25 @@
                 </a:solidFill>
                 <a:latin typeface="Nunito Sans"/>
               </a:rPr>
-              <a:t>¿Su respuesta es verdadera? Sí.</a:t>
+              <a:t>«La usa toda su cuadrilla»: camino del </a:t>
+            </a:r>
+            <a:r>
+              <a:rPr sz="2400" b="1">
+                <a:solidFill>
+                  <a:srgbClr val="1F2A44"/>
+                </a:solidFill>
+                <a:latin typeface="Nunito Sans"/>
+              </a:rPr>
+              <a:t>grupo</a:t>
+            </a:r>
+            <a:r>
+              <a:rPr sz="2400" b="0">
+                <a:solidFill>
+                  <a:srgbClr val="1F2A44"/>
+                </a:solidFill>
+                <a:latin typeface="Nunito Sans"/>
+              </a:rPr>
+              <a:t>.</a:t>
             </a:r>
           </a:p>
           <a:p>
@@ -4286,7 +4580,25 @@
                 </a:solidFill>
                 <a:latin typeface="Nunito Sans"/>
               </a:rPr>
-              <a:t>¿Tenía razones para elegir la b)? No: la eligió al azar.</a:t>
+              <a:t>«La anuncia su influencer»: camino de la </a:t>
+            </a:r>
+            <a:r>
+              <a:rPr sz="2400" b="1">
+                <a:solidFill>
+                  <a:srgbClr val="1F2A44"/>
+                </a:solidFill>
+                <a:latin typeface="Nunito Sans"/>
+              </a:rPr>
+              <a:t>autoridad</a:t>
+            </a:r>
+            <a:r>
+              <a:rPr sz="2400" b="0">
+                <a:solidFill>
+                  <a:srgbClr val="1F2A44"/>
+                </a:solidFill>
+                <a:latin typeface="Nunito Sans"/>
+              </a:rPr>
+              <a:t>. Pero ¿sabe de piel?</a:t>
             </a:r>
           </a:p>
           <a:p>
@@ -4311,7 +4623,25 @@
                 </a:solidFill>
                 <a:latin typeface="Nunito Sans"/>
               </a:rPr>
-              <a:t>¿Sabía la respuesta? No: acertó por suerte.</a:t>
+              <a:t>«Le hace mucha ilusión»: camino de la </a:t>
+            </a:r>
+            <a:r>
+              <a:rPr sz="2400" b="1">
+                <a:solidFill>
+                  <a:srgbClr val="1F2A44"/>
+                </a:solidFill>
+                <a:latin typeface="Nunito Sans"/>
+              </a:rPr>
+              <a:t>emoción</a:t>
+            </a:r>
+            <a:r>
+              <a:rPr sz="2400" b="0">
+                <a:solidFill>
+                  <a:srgbClr val="1F2A44"/>
+                </a:solidFill>
+                <a:latin typeface="Nunito Sans"/>
+              </a:rPr>
+              <a:t>.</a:t>
             </a:r>
           </a:p>
           <a:p>
@@ -4336,7 +4666,7 @@
                 </a:solidFill>
                 <a:latin typeface="Nunito Sans"/>
               </a:rPr>
-              <a:t>Conclusión: para saber no basta con acertar. Hacen falta buenas razones.</a:t>
+              <a:t>Conclusión: nada de eso dice si la crema funciona. Mejor preguntar a quien sabe: un médico o una farmacéutica.</a:t>
             </a:r>
           </a:p>
         </p:txBody>
@@ -4350,6 +4680,358 @@
 </file>
 
 <file path=ppt/slides/slide13.xml><?xml version="1.0" encoding="utf-8"?>
+<p:sld xmlns:a="http://schemas.openxmlformats.org/drawingml/2006/main" xmlns:p="http://schemas.openxmlformats.org/presentationml/2006/main" xmlns:r="http://schemas.openxmlformats.org/officeDocument/2006/relationships">
+  <p:cSld>
+    <p:bg>
+      <p:bgPr>
+        <a:solidFill>
+          <a:srgbClr val="F6C9A8"/>
+        </a:solidFill>
+        <a:effectLst/>
+      </p:bgPr>
+    </p:bg>
+    <p:spTree>
+      <p:nvGrpSpPr>
+        <p:cNvPr id="1" name=""/>
+        <p:cNvGrpSpPr/>
+        <p:nvPr/>
+      </p:nvGrpSpPr>
+      <p:grpSpPr/>
+      <p:sp>
+        <p:nvSpPr>
+          <p:cNvPr id="2" name="TextBox 1"/>
+          <p:cNvSpPr txBox="1"/>
+          <p:nvPr/>
+        </p:nvSpPr>
+        <p:spPr>
+          <a:xfrm>
+            <a:off x="640000" y="380000"/>
+            <a:ext cx="10912000" cy="420000"/>
+          </a:xfrm>
+          <a:prstGeom prst="rect">
+            <a:avLst/>
+          </a:prstGeom>
+          <a:noFill/>
+        </p:spPr>
+        <p:txBody>
+          <a:bodyPr wrap="square">
+            <a:spAutoFit/>
+          </a:bodyPr>
+          <a:lstStyle/>
+          <a:p>
+            <a:pPr>
+              <a:spcAft>
+                <a:spcPts val="630"/>
+              </a:spcAft>
+            </a:pPr>
+            <a:r>
+              <a:rPr sz="1400" b="1">
+                <a:solidFill>
+                  <a:srgbClr val="1F2A44"/>
+                </a:solidFill>
+                <a:latin typeface="Nunito Sans"/>
+              </a:rPr>
+              <a:t>CASO TRAMPA · BLOQUE 2 · EL REY QUE COJEABA</a:t>
+            </a:r>
+          </a:p>
+        </p:txBody>
+      </p:sp>
+      <p:sp>
+        <p:nvSpPr>
+          <p:cNvPr id="3" name="TextBox 2"/>
+          <p:cNvSpPr txBox="1"/>
+          <p:nvPr/>
+        </p:nvSpPr>
+        <p:spPr>
+          <a:xfrm>
+            <a:off x="640000" y="760000"/>
+            <a:ext cx="10912000" cy="800000"/>
+          </a:xfrm>
+          <a:prstGeom prst="rect">
+            <a:avLst/>
+          </a:prstGeom>
+          <a:noFill/>
+        </p:spPr>
+        <p:txBody>
+          <a:bodyPr wrap="square">
+            <a:spAutoFit/>
+          </a:bodyPr>
+          <a:lstStyle/>
+          <a:p>
+            <a:pPr>
+              <a:spcAft>
+                <a:spcPts val="1710"/>
+              </a:spcAft>
+            </a:pPr>
+            <a:r>
+              <a:rPr sz="3800" b="1">
+                <a:solidFill>
+                  <a:srgbClr val="1F2A44"/>
+                </a:solidFill>
+                <a:latin typeface="Fredoka"/>
+              </a:rPr>
+              <a:t>⚠ ¿Autoridad = mala razón?</a:t>
+            </a:r>
+          </a:p>
+        </p:txBody>
+      </p:sp>
+      <p:sp>
+        <p:nvSpPr>
+          <p:cNvPr id="4" name="Rectangle 3"/>
+          <p:cNvSpPr/>
+          <p:nvPr/>
+        </p:nvSpPr>
+        <p:spPr>
+          <a:xfrm>
+            <a:off x="640000" y="1600000"/>
+            <a:ext cx="10912000" cy="1100000"/>
+          </a:xfrm>
+          <a:prstGeom prst="rect">
+            <a:avLst/>
+          </a:prstGeom>
+          <a:solidFill>
+            <a:srgbClr val="FBF7EF"/>
+          </a:solidFill>
+          <a:ln>
+            <a:noFill/>
+          </a:ln>
+        </p:spPr>
+        <p:style>
+          <a:lnRef idx="1">
+            <a:schemeClr val="accent1"/>
+          </a:lnRef>
+          <a:fillRef idx="3">
+            <a:schemeClr val="accent1"/>
+          </a:fillRef>
+          <a:effectRef idx="2">
+            <a:schemeClr val="accent1"/>
+          </a:effectRef>
+          <a:fontRef idx="minor">
+            <a:schemeClr val="lt1"/>
+          </a:fontRef>
+        </p:style>
+        <p:txBody>
+          <a:bodyPr rtlCol="0" anchor="ctr"/>
+          <a:lstStyle/>
+          <a:p>
+            <a:pPr algn="ctr"/>
+          </a:p>
+        </p:txBody>
+      </p:sp>
+      <p:sp>
+        <p:nvSpPr>
+          <p:cNvPr id="5" name="TextBox 4"/>
+          <p:cNvSpPr txBox="1"/>
+          <p:nvPr/>
+        </p:nvSpPr>
+        <p:spPr>
+          <a:xfrm>
+            <a:off x="840000" y="1650000"/>
+            <a:ext cx="10512000" cy="1000000"/>
+          </a:xfrm>
+          <a:prstGeom prst="rect">
+            <a:avLst/>
+          </a:prstGeom>
+          <a:noFill/>
+        </p:spPr>
+        <p:txBody>
+          <a:bodyPr wrap="square" anchor="ctr">
+            <a:spAutoFit/>
+          </a:bodyPr>
+          <a:lstStyle/>
+          <a:p>
+            <a:pPr>
+              <a:spcAft>
+                <a:spcPts val="1170"/>
+              </a:spcAft>
+            </a:pPr>
+            <a:r>
+              <a:rPr sz="2600" b="1">
+                <a:solidFill>
+                  <a:srgbClr val="1F2A44"/>
+                </a:solidFill>
+                <a:latin typeface="Nunito Sans"/>
+              </a:rPr>
+              <a:t>Un chico cree que la Tierra gira alrededor del Sol. Nunca lo ha comprobado: se lo explicó su profesora.</a:t>
+            </a:r>
+          </a:p>
+        </p:txBody>
+      </p:sp>
+      <p:sp>
+        <p:nvSpPr>
+          <p:cNvPr id="6" name="TextBox 5"/>
+          <p:cNvSpPr txBox="1"/>
+          <p:nvPr/>
+        </p:nvSpPr>
+        <p:spPr>
+          <a:xfrm>
+            <a:off x="640000" y="2900000"/>
+            <a:ext cx="10912000" cy="3500000"/>
+          </a:xfrm>
+          <a:prstGeom prst="rect">
+            <a:avLst/>
+          </a:prstGeom>
+          <a:noFill/>
+        </p:spPr>
+        <p:txBody>
+          <a:bodyPr wrap="square">
+            <a:spAutoFit/>
+          </a:bodyPr>
+          <a:lstStyle/>
+          <a:p>
+            <a:pPr>
+              <a:spcAft>
+                <a:spcPts val="1080"/>
+              </a:spcAft>
+            </a:pPr>
+            <a:r>
+              <a:rPr sz="2400" b="1">
+                <a:solidFill>
+                  <a:srgbClr val="E8793A"/>
+                </a:solidFill>
+                <a:latin typeface="Nunito Sans"/>
+              </a:rPr>
+              <a:t>1. </a:t>
+            </a:r>
+            <a:r>
+              <a:rPr sz="2400" b="0">
+                <a:solidFill>
+                  <a:srgbClr val="1F2A44"/>
+                </a:solidFill>
+                <a:latin typeface="Nunito Sans"/>
+              </a:rPr>
+              <a:t>Lo cree por autoridad… ¿entonces es una mala razón?</a:t>
+            </a:r>
+          </a:p>
+          <a:p>
+            <a:pPr>
+              <a:spcAft>
+                <a:spcPts val="1080"/>
+              </a:spcAft>
+            </a:pPr>
+            <a:r>
+              <a:rPr sz="2400" b="1">
+                <a:solidFill>
+                  <a:srgbClr val="E8793A"/>
+                </a:solidFill>
+                <a:latin typeface="Nunito Sans"/>
+              </a:rPr>
+              <a:t>2. </a:t>
+            </a:r>
+            <a:r>
+              <a:rPr sz="2400" b="0">
+                <a:solidFill>
+                  <a:srgbClr val="1F2A44"/>
+                </a:solidFill>
+                <a:latin typeface="Nunito Sans"/>
+              </a:rPr>
+              <a:t>Sí, es el camino de la autoridad.</a:t>
+            </a:r>
+          </a:p>
+          <a:p>
+            <a:pPr>
+              <a:spcAft>
+                <a:spcPts val="1080"/>
+              </a:spcAft>
+            </a:pPr>
+            <a:r>
+              <a:rPr sz="2400" b="1">
+                <a:solidFill>
+                  <a:srgbClr val="E8793A"/>
+                </a:solidFill>
+                <a:latin typeface="Nunito Sans"/>
+              </a:rPr>
+              <a:t>3. </a:t>
+            </a:r>
+            <a:r>
+              <a:rPr sz="2400" b="0">
+                <a:solidFill>
+                  <a:srgbClr val="1F2A44"/>
+                </a:solidFill>
+                <a:latin typeface="Nunito Sans"/>
+              </a:rPr>
+              <a:t>Pero la profesora </a:t>
+            </a:r>
+            <a:r>
+              <a:rPr sz="2400" b="1">
+                <a:solidFill>
+                  <a:srgbClr val="1F2A44"/>
+                </a:solidFill>
+                <a:latin typeface="Nunito Sans"/>
+              </a:rPr>
+              <a:t>sabe del tema</a:t>
+            </a:r>
+            <a:r>
+              <a:rPr sz="2400" b="0">
+                <a:solidFill>
+                  <a:srgbClr val="1F2A44"/>
+                </a:solidFill>
+                <a:latin typeface="Nunito Sans"/>
+              </a:rPr>
+              <a:t>, y la ciencia lo ha comprobado muchísimas veces.</a:t>
+            </a:r>
+          </a:p>
+          <a:p>
+            <a:pPr>
+              <a:spcAft>
+                <a:spcPts val="1080"/>
+              </a:spcAft>
+            </a:pPr>
+            <a:r>
+              <a:rPr sz="2400" b="1">
+                <a:solidFill>
+                  <a:srgbClr val="E8793A"/>
+                </a:solidFill>
+                <a:latin typeface="Nunito Sans"/>
+              </a:rPr>
+              <a:t>4. </a:t>
+            </a:r>
+            <a:r>
+              <a:rPr sz="2400" b="0">
+                <a:solidFill>
+                  <a:srgbClr val="1F2A44"/>
+                </a:solidFill>
+                <a:latin typeface="Nunito Sans"/>
+              </a:rPr>
+              <a:t>No es como el influencer de la crema: él no sabe de piel.</a:t>
+            </a:r>
+          </a:p>
+          <a:p>
+            <a:pPr>
+              <a:spcAft>
+                <a:spcPts val="1080"/>
+              </a:spcAft>
+            </a:pPr>
+            <a:r>
+              <a:rPr sz="2400" b="1">
+                <a:solidFill>
+                  <a:srgbClr val="E8793A"/>
+                </a:solidFill>
+                <a:latin typeface="Nunito Sans"/>
+              </a:rPr>
+              <a:t>5. </a:t>
+            </a:r>
+            <a:r>
+              <a:rPr sz="2400" b="0">
+                <a:solidFill>
+                  <a:srgbClr val="1F2A44"/>
+                </a:solidFill>
+                <a:latin typeface="Nunito Sans"/>
+              </a:rPr>
+              <a:t>Conclusión: el problema no es fiarse de alguien, sino fiarse de quien no sabe.</a:t>
+            </a:r>
+          </a:p>
+        </p:txBody>
+      </p:sp>
+    </p:spTree>
+  </p:cSld>
+  <p:clrMapOvr>
+    <a:masterClrMapping/>
+  </p:clrMapOvr>
+</p:sld>
+</file>
+
+<file path=ppt/slides/slide14.xml><?xml version="1.0" encoding="utf-8"?>
 <p:sld xmlns:a="http://schemas.openxmlformats.org/drawingml/2006/main" xmlns:p="http://schemas.openxmlformats.org/presentationml/2006/main" xmlns:r="http://schemas.openxmlformats.org/officeDocument/2006/relationships">
   <p:cSld>
     <p:bg>
@@ -4401,7 +5083,7 @@
                 </a:solidFill>
                 <a:latin typeface="Nunito Sans"/>
               </a:rPr>
-              <a:t>BLOQUE 2 · CASOS RESUELTOS</a:t>
+              <a:t>LO DE HOY EN TRES LÍNEAS</a:t>
             </a:r>
           </a:p>
         </p:txBody>
@@ -4440,64 +5122,21 @@
                 </a:solidFill>
                 <a:latin typeface="Fredoka"/>
               </a:rPr>
-              <a:t>Caso 3 · Saber de verdad</a:t>
-            </a:r>
-          </a:p>
-        </p:txBody>
-      </p:sp>
-      <p:sp>
-        <p:nvSpPr>
-          <p:cNvPr id="4" name="Rectangle 3"/>
-          <p:cNvSpPr/>
-          <p:nvPr/>
-        </p:nvSpPr>
-        <p:spPr>
-          <a:xfrm>
-            <a:off x="640000" y="1600000"/>
-            <a:ext cx="10912000" cy="1100000"/>
-          </a:xfrm>
-          <a:prstGeom prst="rect">
-            <a:avLst/>
-          </a:prstGeom>
-          <a:solidFill>
-            <a:srgbClr val="FFFFFF"/>
-          </a:solidFill>
-          <a:ln>
-            <a:noFill/>
-          </a:ln>
-        </p:spPr>
-        <p:style>
-          <a:lnRef idx="1">
-            <a:schemeClr val="accent1"/>
-          </a:lnRef>
-          <a:fillRef idx="3">
-            <a:schemeClr val="accent1"/>
-          </a:fillRef>
-          <a:effectRef idx="2">
-            <a:schemeClr val="accent1"/>
-          </a:effectRef>
-          <a:fontRef idx="minor">
-            <a:schemeClr val="lt1"/>
-          </a:fontRef>
-        </p:style>
-        <p:txBody>
-          <a:bodyPr rtlCol="0" anchor="ctr"/>
-          <a:lstStyle/>
-          <a:p>
-            <a:pPr algn="ctr"/>
-          </a:p>
-        </p:txBody>
-      </p:sp>
-      <p:sp>
-        <p:nvSpPr>
-          <p:cNvPr id="5" name="TextBox 4"/>
+              <a:t>Escríbelo tú primero, sin mirar</a:t>
+            </a:r>
+          </a:p>
+        </p:txBody>
+      </p:sp>
+      <p:sp>
+        <p:nvSpPr>
+          <p:cNvPr id="4" name="TextBox 3"/>
           <p:cNvSpPr txBox="1"/>
           <p:nvPr/>
         </p:nvSpPr>
         <p:spPr>
           <a:xfrm>
-            <a:off x="840000" y="1650000"/>
-            <a:ext cx="10512000" cy="1000000"/>
+            <a:off x="640000" y="1800000"/>
+            <a:ext cx="10912000" cy="1500000"/>
           </a:xfrm>
           <a:prstGeom prst="rect">
             <a:avLst/>
@@ -4505,45 +5144,6 @@
           <a:noFill/>
         </p:spPr>
         <p:txBody>
-          <a:bodyPr wrap="square" anchor="ctr">
-            <a:spAutoFit/>
-          </a:bodyPr>
-          <a:lstStyle/>
-          <a:p>
-            <a:pPr>
-              <a:spcAft>
-                <a:spcPts val="1170"/>
-              </a:spcAft>
-            </a:pPr>
-            <a:r>
-              <a:rPr sz="2600" b="1">
-                <a:solidFill>
-                  <a:srgbClr val="1F2A44"/>
-                </a:solidFill>
-                <a:latin typeface="Nunito Sans"/>
-              </a:rPr>
-              <a:t>Una chica dice: «El agua hierve a 100 grados a nivel del mar». Lo explicaron en clase y ella lo midió en el laboratorio.</a:t>
-            </a:r>
-          </a:p>
-        </p:txBody>
-      </p:sp>
-      <p:sp>
-        <p:nvSpPr>
-          <p:cNvPr id="6" name="TextBox 5"/>
-          <p:cNvSpPr txBox="1"/>
-          <p:nvPr/>
-        </p:nvSpPr>
-        <p:spPr>
-          <a:xfrm>
-            <a:off x="640000" y="2900000"/>
-            <a:ext cx="10912000" cy="3500000"/>
-          </a:xfrm>
-          <a:prstGeom prst="rect">
-            <a:avLst/>
-          </a:prstGeom>
-          <a:noFill/>
-        </p:spPr>
-        <p:txBody>
           <a:bodyPr wrap="square">
             <a:spAutoFit/>
           </a:bodyPr>
@@ -4551,410 +5151,17 @@
           <a:p>
             <a:pPr>
               <a:spcAft>
-                <a:spcPts val="1080"/>
-              </a:spcAft>
-            </a:pPr>
-            <a:r>
-              <a:rPr sz="2400" b="1">
-                <a:solidFill>
-                  <a:srgbClr val="E8793A"/>
-                </a:solidFill>
-                <a:latin typeface="Nunito Sans"/>
-              </a:rPr>
-              <a:t>1. </a:t>
-            </a:r>
-            <a:r>
-              <a:rPr sz="2400" b="0">
-                <a:solidFill>
-                  <a:srgbClr val="1F2A44"/>
-                </a:solidFill>
-                <a:latin typeface="Nunito Sans"/>
-              </a:rPr>
-              <a:t>¿Es verdad? Sí: es un dato muy comprobado.</a:t>
-            </a:r>
-          </a:p>
-          <a:p>
-            <a:pPr>
-              <a:spcAft>
-                <a:spcPts val="1080"/>
-              </a:spcAft>
-            </a:pPr>
-            <a:r>
-              <a:rPr sz="2400" b="1">
-                <a:solidFill>
-                  <a:srgbClr val="E8793A"/>
-                </a:solidFill>
-                <a:latin typeface="Nunito Sans"/>
-              </a:rPr>
-              <a:t>2. </a:t>
-            </a:r>
-            <a:r>
-              <a:rPr sz="2400" b="0">
-                <a:solidFill>
-                  <a:srgbClr val="1F2A44"/>
-                </a:solidFill>
-                <a:latin typeface="Nunito Sans"/>
-              </a:rPr>
-              <a:t>¿Tiene buenas razones? Sí: se lo explicaron y lo midió ella misma.</a:t>
-            </a:r>
-          </a:p>
-          <a:p>
-            <a:pPr>
-              <a:spcAft>
-                <a:spcPts val="1080"/>
-              </a:spcAft>
-            </a:pPr>
-            <a:r>
-              <a:rPr sz="2400" b="1">
-                <a:solidFill>
-                  <a:srgbClr val="E8793A"/>
-                </a:solidFill>
-                <a:latin typeface="Nunito Sans"/>
-              </a:rPr>
-              <a:t>3. </a:t>
-            </a:r>
-            <a:r>
-              <a:rPr sz="2400" b="0">
-                <a:solidFill>
-                  <a:srgbClr val="1F2A44"/>
-                </a:solidFill>
-                <a:latin typeface="Nunito Sans"/>
-              </a:rPr>
-              <a:t>Conclusión: esa chica lo sabe. Es verdad y tiene buenas razones.</a:t>
-            </a:r>
-          </a:p>
-        </p:txBody>
-      </p:sp>
-    </p:spTree>
-  </p:cSld>
-  <p:clrMapOvr>
-    <a:masterClrMapping/>
-  </p:clrMapOvr>
-</p:sld>
-</file>
-
-<file path=ppt/slides/slide14.xml><?xml version="1.0" encoding="utf-8"?>
-<p:sld xmlns:a="http://schemas.openxmlformats.org/drawingml/2006/main" xmlns:p="http://schemas.openxmlformats.org/presentationml/2006/main" xmlns:r="http://schemas.openxmlformats.org/officeDocument/2006/relationships">
-  <p:cSld>
-    <p:bg>
-      <p:bgPr>
-        <a:solidFill>
-          <a:srgbClr val="F6C9A8"/>
-        </a:solidFill>
-        <a:effectLst/>
-      </p:bgPr>
-    </p:bg>
-    <p:spTree>
-      <p:nvGrpSpPr>
-        <p:cNvPr id="1" name=""/>
-        <p:cNvGrpSpPr/>
-        <p:nvPr/>
-      </p:nvGrpSpPr>
-      <p:grpSpPr/>
-      <p:sp>
-        <p:nvSpPr>
-          <p:cNvPr id="2" name="TextBox 1"/>
-          <p:cNvSpPr txBox="1"/>
-          <p:nvPr/>
-        </p:nvSpPr>
-        <p:spPr>
-          <a:xfrm>
-            <a:off x="640000" y="380000"/>
-            <a:ext cx="10912000" cy="420000"/>
-          </a:xfrm>
-          <a:prstGeom prst="rect">
-            <a:avLst/>
-          </a:prstGeom>
-          <a:noFill/>
-        </p:spPr>
-        <p:txBody>
-          <a:bodyPr wrap="square">
-            <a:spAutoFit/>
-          </a:bodyPr>
-          <a:lstStyle/>
-          <a:p>
-            <a:pPr>
-              <a:spcAft>
-                <a:spcPts val="630"/>
-              </a:spcAft>
-            </a:pPr>
-            <a:r>
-              <a:rPr sz="1400" b="1">
-                <a:solidFill>
-                  <a:srgbClr val="1F2A44"/>
-                </a:solidFill>
-                <a:latin typeface="Nunito Sans"/>
-              </a:rPr>
-              <a:t>CASO TRAMPA · BLOQUE 2 · CASOS RESUELTOS</a:t>
-            </a:r>
-          </a:p>
-        </p:txBody>
-      </p:sp>
-      <p:sp>
-        <p:nvSpPr>
-          <p:cNvPr id="3" name="TextBox 2"/>
-          <p:cNvSpPr txBox="1"/>
-          <p:nvPr/>
-        </p:nvSpPr>
-        <p:spPr>
-          <a:xfrm>
-            <a:off x="640000" y="760000"/>
-            <a:ext cx="10912000" cy="800000"/>
-          </a:xfrm>
-          <a:prstGeom prst="rect">
-            <a:avLst/>
-          </a:prstGeom>
-          <a:noFill/>
-        </p:spPr>
-        <p:txBody>
-          <a:bodyPr wrap="square">
-            <a:spAutoFit/>
-          </a:bodyPr>
-          <a:lstStyle/>
-          <a:p>
-            <a:pPr>
-              <a:spcAft>
-                <a:spcPts val="1710"/>
-              </a:spcAft>
-            </a:pPr>
-            <a:r>
-              <a:rPr sz="3800" b="1">
-                <a:solidFill>
-                  <a:srgbClr val="1F2A44"/>
-                </a:solidFill>
-                <a:latin typeface="Fredoka"/>
-              </a:rPr>
-              <a:t>⚠ El reloj parado</a:t>
-            </a:r>
-          </a:p>
-        </p:txBody>
-      </p:sp>
-      <p:sp>
-        <p:nvSpPr>
-          <p:cNvPr id="4" name="Rectangle 3"/>
-          <p:cNvSpPr/>
-          <p:nvPr/>
-        </p:nvSpPr>
-        <p:spPr>
-          <a:xfrm>
-            <a:off x="640000" y="1600000"/>
-            <a:ext cx="10912000" cy="1100000"/>
-          </a:xfrm>
-          <a:prstGeom prst="rect">
-            <a:avLst/>
-          </a:prstGeom>
-          <a:solidFill>
-            <a:srgbClr val="FBF7EF"/>
-          </a:solidFill>
-          <a:ln>
-            <a:noFill/>
-          </a:ln>
-        </p:spPr>
-        <p:style>
-          <a:lnRef idx="1">
-            <a:schemeClr val="accent1"/>
-          </a:lnRef>
-          <a:fillRef idx="3">
-            <a:schemeClr val="accent1"/>
-          </a:fillRef>
-          <a:effectRef idx="2">
-            <a:schemeClr val="accent1"/>
-          </a:effectRef>
-          <a:fontRef idx="minor">
-            <a:schemeClr val="lt1"/>
-          </a:fontRef>
-        </p:style>
-        <p:txBody>
-          <a:bodyPr rtlCol="0" anchor="ctr"/>
-          <a:lstStyle/>
-          <a:p>
-            <a:pPr algn="ctr"/>
-          </a:p>
-        </p:txBody>
-      </p:sp>
-      <p:sp>
-        <p:nvSpPr>
-          <p:cNvPr id="5" name="TextBox 4"/>
-          <p:cNvSpPr txBox="1"/>
-          <p:nvPr/>
-        </p:nvSpPr>
-        <p:spPr>
-          <a:xfrm>
-            <a:off x="840000" y="1650000"/>
-            <a:ext cx="10512000" cy="1000000"/>
-          </a:xfrm>
-          <a:prstGeom prst="rect">
-            <a:avLst/>
-          </a:prstGeom>
-          <a:noFill/>
-        </p:spPr>
-        <p:txBody>
-          <a:bodyPr wrap="square" anchor="ctr">
-            <a:spAutoFit/>
-          </a:bodyPr>
-          <a:lstStyle/>
-          <a:p>
-            <a:pPr>
-              <a:spcAft>
                 <a:spcPts val="1170"/>
               </a:spcAft>
             </a:pPr>
             <a:r>
-              <a:rPr sz="2600" b="1">
-                <a:solidFill>
-                  <a:srgbClr val="1F2A44"/>
-                </a:solidFill>
-                <a:latin typeface="Nunito Sans"/>
-              </a:rPr>
-              <a:t>Una chica mira el reloj del pasillo: marca las 10:15. Son las 10:15. Pero el reloj está parado desde ayer a las 10:15.</a:t>
-            </a:r>
-          </a:p>
-        </p:txBody>
-      </p:sp>
-      <p:sp>
-        <p:nvSpPr>
-          <p:cNvPr id="6" name="TextBox 5"/>
-          <p:cNvSpPr txBox="1"/>
-          <p:nvPr/>
-        </p:nvSpPr>
-        <p:spPr>
-          <a:xfrm>
-            <a:off x="640000" y="2900000"/>
-            <a:ext cx="10912000" cy="3500000"/>
-          </a:xfrm>
-          <a:prstGeom prst="rect">
-            <a:avLst/>
-          </a:prstGeom>
-          <a:noFill/>
-        </p:spPr>
-        <p:txBody>
-          <a:bodyPr wrap="square">
-            <a:spAutoFit/>
-          </a:bodyPr>
-          <a:lstStyle/>
-          <a:p>
-            <a:pPr>
-              <a:spcAft>
-                <a:spcPts val="1080"/>
-              </a:spcAft>
-            </a:pPr>
-            <a:r>
-              <a:rPr sz="2400" b="1">
-                <a:solidFill>
-                  <a:srgbClr val="E8793A"/>
-                </a:solidFill>
-                <a:latin typeface="Nunito Sans"/>
-              </a:rPr>
-              <a:t>1. </a:t>
-            </a:r>
-            <a:r>
-              <a:rPr sz="2400" b="0">
-                <a:solidFill>
-                  <a:srgbClr val="1F2A44"/>
-                </a:solidFill>
-                <a:latin typeface="Nunito Sans"/>
-              </a:rPr>
-              <a:t>¿Sabe esa chica qué hora es?</a:t>
-            </a:r>
-          </a:p>
-          <a:p>
-            <a:pPr>
-              <a:spcAft>
-                <a:spcPts val="1080"/>
-              </a:spcAft>
-            </a:pPr>
-            <a:r>
-              <a:rPr sz="2400" b="1">
-                <a:solidFill>
-                  <a:srgbClr val="E8793A"/>
-                </a:solidFill>
-                <a:latin typeface="Nunito Sans"/>
-              </a:rPr>
-              <a:t>2. </a:t>
-            </a:r>
-            <a:r>
-              <a:rPr sz="2400" b="0">
-                <a:solidFill>
-                  <a:srgbClr val="1F2A44"/>
-                </a:solidFill>
-                <a:latin typeface="Nunito Sans"/>
-              </a:rPr>
-              <a:t>¿Lo cree? Sí. ¿Es verdad? Sí: son las 10:15.</a:t>
-            </a:r>
-          </a:p>
-          <a:p>
-            <a:pPr>
-              <a:spcAft>
-                <a:spcPts val="1080"/>
-              </a:spcAft>
-            </a:pPr>
-            <a:r>
-              <a:rPr sz="2400" b="1">
-                <a:solidFill>
-                  <a:srgbClr val="E8793A"/>
-                </a:solidFill>
-                <a:latin typeface="Nunito Sans"/>
-              </a:rPr>
-              <a:t>3. </a:t>
-            </a:r>
-            <a:r>
-              <a:rPr sz="2400" b="0">
-                <a:solidFill>
-                  <a:srgbClr val="1F2A44"/>
-                </a:solidFill>
-                <a:latin typeface="Nunito Sans"/>
-              </a:rPr>
-              <a:t>¿Tiene una razón? Sí: los relojes del pasillo suelen funcionar.</a:t>
-            </a:r>
-          </a:p>
-          <a:p>
-            <a:pPr>
-              <a:spcAft>
-                <a:spcPts val="1080"/>
-              </a:spcAft>
-            </a:pPr>
-            <a:r>
-              <a:rPr sz="2400" b="1">
-                <a:solidFill>
-                  <a:srgbClr val="E8793A"/>
-                </a:solidFill>
-                <a:latin typeface="Nunito Sans"/>
-              </a:rPr>
-              <a:t>4. </a:t>
-            </a:r>
-            <a:r>
-              <a:rPr sz="2400" b="0">
-                <a:solidFill>
-                  <a:srgbClr val="1F2A44"/>
-                </a:solidFill>
-                <a:latin typeface="Nunito Sans"/>
-              </a:rPr>
-              <a:t>Y aun así acierta por suerte: el reloj no funciona.</a:t>
-            </a:r>
-          </a:p>
-          <a:p>
-            <a:pPr>
-              <a:spcAft>
-                <a:spcPts val="1080"/>
-              </a:spcAft>
-            </a:pPr>
-            <a:r>
-              <a:rPr sz="2400" b="1">
-                <a:solidFill>
-                  <a:srgbClr val="E8793A"/>
-                </a:solidFill>
-                <a:latin typeface="Nunito Sans"/>
-              </a:rPr>
-              <a:t>5. </a:t>
-            </a:r>
-            <a:r>
-              <a:rPr sz="2400" b="0">
-                <a:solidFill>
-                  <a:srgbClr val="1F2A44"/>
-                </a:solidFill>
-                <a:latin typeface="Nunito Sans"/>
-              </a:rPr>
-              <a:t>Conclusión: la definición de saber no es perfecta. Los filósofos lo siguen discutiendo.</a:t>
+              <a:rPr sz="2600" b="0">
+                <a:solidFill>
+                  <a:srgbClr val="4A5568"/>
+                </a:solidFill>
+                <a:latin typeface="Nunito Sans"/>
+              </a:rPr>
+              <a:t>Dos minutos. Después lo comparamos.</a:t>
             </a:r>
           </a:p>
         </p:txBody>
@@ -5032,8 +5239,8 @@
         </p:nvSpPr>
         <p:spPr>
           <a:xfrm>
-            <a:off x="640000" y="760000"/>
-            <a:ext cx="10912000" cy="800000"/>
+            <a:off x="640000" y="1300000"/>
+            <a:ext cx="10912000" cy="4800000"/>
           </a:xfrm>
           <a:prstGeom prst="rect">
             <a:avLst/>
@@ -5048,56 +5255,76 @@
           <a:p>
             <a:pPr>
               <a:spcAft>
-                <a:spcPts val="1710"/>
-              </a:spcAft>
-            </a:pPr>
-            <a:r>
-              <a:rPr sz="3800" b="1">
+                <a:spcPts val="1350"/>
+              </a:spcAft>
+            </a:pPr>
+            <a:r>
+              <a:rPr sz="3000" b="1">
+                <a:solidFill>
+                  <a:srgbClr val="E8793A"/>
+                </a:solidFill>
+                <a:latin typeface="Nunito Sans"/>
+              </a:rPr>
+              <a:t>1. </a:t>
+            </a:r>
+            <a:r>
+              <a:rPr sz="3000" b="0">
                 <a:solidFill>
                   <a:srgbClr val="1F2A44"/>
                 </a:solidFill>
-                <a:latin typeface="Fredoka"/>
-              </a:rPr>
-              <a:t>Escríbelo tú primero, sin mirar</a:t>
-            </a:r>
-          </a:p>
-        </p:txBody>
-      </p:sp>
-      <p:sp>
-        <p:nvSpPr>
-          <p:cNvPr id="4" name="TextBox 3"/>
-          <p:cNvSpPr txBox="1"/>
-          <p:nvPr/>
-        </p:nvSpPr>
-        <p:spPr>
-          <a:xfrm>
-            <a:off x="640000" y="1800000"/>
-            <a:ext cx="10912000" cy="1500000"/>
-          </a:xfrm>
-          <a:prstGeom prst="rect">
-            <a:avLst/>
-          </a:prstGeom>
-          <a:noFill/>
-        </p:spPr>
-        <p:txBody>
-          <a:bodyPr wrap="square">
-            <a:spAutoFit/>
-          </a:bodyPr>
-          <a:lstStyle/>
-          <a:p>
-            <a:pPr>
-              <a:spcAft>
-                <a:spcPts val="1170"/>
-              </a:spcAft>
-            </a:pPr>
-            <a:r>
-              <a:rPr sz="2600" b="0">
-                <a:solidFill>
-                  <a:srgbClr val="4A5568"/>
-                </a:solidFill>
-                <a:latin typeface="Nunito Sans"/>
-              </a:rPr>
-              <a:t>Dos minutos. Después lo comparamos.</a:t>
+                <a:latin typeface="Nunito Sans"/>
+              </a:rPr>
+              <a:t>Muchas creencias vienen de la costumbre, el grupo, la autoridad o la emoción.</a:t>
+            </a:r>
+          </a:p>
+          <a:p>
+            <a:pPr>
+              <a:spcAft>
+                <a:spcPts val="1350"/>
+              </a:spcAft>
+            </a:pPr>
+            <a:r>
+              <a:rPr sz="3000" b="1">
+                <a:solidFill>
+                  <a:srgbClr val="E8793A"/>
+                </a:solidFill>
+                <a:latin typeface="Nunito Sans"/>
+              </a:rPr>
+              <a:t>2. </a:t>
+            </a:r>
+            <a:r>
+              <a:rPr sz="3000" b="0">
+                <a:solidFill>
+                  <a:srgbClr val="1F2A44"/>
+                </a:solidFill>
+                <a:latin typeface="Nunito Sans"/>
+              </a:rPr>
+              <a:t>Esos caminos pueden acertar o fallar: fiarse de quien sabe del tema es razonable.</a:t>
+            </a:r>
+          </a:p>
+          <a:p>
+            <a:pPr>
+              <a:spcAft>
+                <a:spcPts val="1350"/>
+              </a:spcAft>
+            </a:pPr>
+            <a:r>
+              <a:rPr sz="3000" b="1">
+                <a:solidFill>
+                  <a:srgbClr val="E8793A"/>
+                </a:solidFill>
+                <a:latin typeface="Nunito Sans"/>
+              </a:rPr>
+              <a:t>3. </a:t>
+            </a:r>
+            <a:r>
+              <a:rPr sz="3000" b="0">
+                <a:solidFill>
+                  <a:srgbClr val="1F2A44"/>
+                </a:solidFill>
+                <a:latin typeface="Nunito Sans"/>
+              </a:rPr>
+              <a:t>Lo importante es poder revisarlas, no creer como el palacio que cojeaba.</a:t>
             </a:r>
           </a:p>
         </p:txBody>
@@ -5116,7 +5343,7 @@
     <p:bg>
       <p:bgPr>
         <a:solidFill>
-          <a:srgbClr val="FBF7EF"/>
+          <a:srgbClr val="1F2A44"/>
         </a:solidFill>
         <a:effectLst/>
       </p:bgPr>
@@ -5158,11 +5385,11 @@
             <a:r>
               <a:rPr sz="1400" b="1">
                 <a:solidFill>
-                  <a:srgbClr val="E8793A"/>
-                </a:solidFill>
-                <a:latin typeface="Nunito Sans"/>
-              </a:rPr>
-              <a:t>LO DE HOY EN TRES LÍNEAS</a:t>
+                  <a:srgbClr val="F4B183"/>
+                </a:solidFill>
+                <a:latin typeface="Nunito Sans"/>
+              </a:rPr>
+              <a:t>VÍDEO</a:t>
             </a:r>
           </a:p>
         </p:txBody>
@@ -5175,8 +5402,8 @@
         </p:nvSpPr>
         <p:spPr>
           <a:xfrm>
-            <a:off x="640000" y="1300000"/>
-            <a:ext cx="10912000" cy="4800000"/>
+            <a:off x="640000" y="760000"/>
+            <a:ext cx="10912000" cy="800000"/>
           </a:xfrm>
           <a:prstGeom prst="rect">
             <a:avLst/>
@@ -5191,76 +5418,56 @@
           <a:p>
             <a:pPr>
               <a:spcAft>
-                <a:spcPts val="1350"/>
-              </a:spcAft>
-            </a:pPr>
-            <a:r>
-              <a:rPr sz="3000" b="1">
-                <a:solidFill>
-                  <a:srgbClr val="E8793A"/>
-                </a:solidFill>
-                <a:latin typeface="Nunito Sans"/>
-              </a:rPr>
-              <a:t>1. </a:t>
-            </a:r>
-            <a:r>
-              <a:rPr sz="3000" b="0">
-                <a:solidFill>
-                  <a:srgbClr val="1F2A44"/>
-                </a:solidFill>
-                <a:latin typeface="Nunito Sans"/>
-              </a:rPr>
-              <a:t>Creer es pensar que algo es verdad, y puede fallar.</a:t>
-            </a:r>
-          </a:p>
-          <a:p>
-            <a:pPr>
-              <a:spcAft>
-                <a:spcPts val="1350"/>
-              </a:spcAft>
-            </a:pPr>
-            <a:r>
-              <a:rPr sz="3000" b="1">
-                <a:solidFill>
-                  <a:srgbClr val="E8793A"/>
-                </a:solidFill>
-                <a:latin typeface="Nunito Sans"/>
-              </a:rPr>
-              <a:t>2. </a:t>
-            </a:r>
-            <a:r>
-              <a:rPr sz="3000" b="0">
-                <a:solidFill>
-                  <a:srgbClr val="1F2A44"/>
-                </a:solidFill>
-                <a:latin typeface="Nunito Sans"/>
-              </a:rPr>
-              <a:t>Solemos decir que saber es creer algo verdadero con buenas razones, aunque hay casos difíciles.</a:t>
-            </a:r>
-          </a:p>
-          <a:p>
-            <a:pPr>
-              <a:spcAft>
-                <a:spcPts val="1350"/>
-              </a:spcAft>
-            </a:pPr>
-            <a:r>
-              <a:rPr sz="3000" b="1">
-                <a:solidFill>
-                  <a:srgbClr val="E8793A"/>
-                </a:solidFill>
-                <a:latin typeface="Nunito Sans"/>
-              </a:rPr>
-              <a:t>3. </a:t>
-            </a:r>
-            <a:r>
-              <a:rPr sz="3000" b="0">
-                <a:solidFill>
-                  <a:srgbClr val="1F2A44"/>
-                </a:solidFill>
-                <a:latin typeface="Nunito Sans"/>
-              </a:rPr>
-              <a:t>Sentirse seguro es un sentimiento: me puedo sentir seguro y estar equivocado.</a:t>
+                <a:spcPts val="1620"/>
+              </a:spcAft>
+            </a:pPr>
+            <a:r>
+              <a:rPr sz="3600" b="1">
+                <a:solidFill>
+                  <a:srgbClr val="FBF7EF"/>
+                </a:solidFill>
+                <a:latin typeface="Fredoka"/>
+              </a:rPr>
+              <a:t>La presión de grupo explicada para adolescentes</a:t>
+            </a:r>
+          </a:p>
+        </p:txBody>
+      </p:sp>
+      <p:sp>
+        <p:nvSpPr>
+          <p:cNvPr id="4" name="TextBox 3"/>
+          <p:cNvSpPr txBox="1"/>
+          <p:nvPr/>
+        </p:nvSpPr>
+        <p:spPr>
+          <a:xfrm>
+            <a:off x="640000" y="2200000"/>
+            <a:ext cx="10912000" cy="2000000"/>
+          </a:xfrm>
+          <a:prstGeom prst="rect">
+            <a:avLst/>
+          </a:prstGeom>
+          <a:noFill/>
+        </p:spPr>
+        <p:txBody>
+          <a:bodyPr wrap="square">
+            <a:spAutoFit/>
+          </a:bodyPr>
+          <a:lstStyle/>
+          <a:p>
+            <a:pPr>
+              <a:spcAft>
+                <a:spcPts val="1080"/>
+              </a:spcAft>
+            </a:pPr>
+            <a:r>
+              <a:rPr sz="2400" b="0">
+                <a:solidFill>
+                  <a:srgbClr val="C9D3E6"/>
+                </a:solidFill>
+                <a:latin typeface="Nunito Sans"/>
+              </a:rPr>
+              <a:t>Ver cómo el grupo nos empuja a pensar y hacer cosas sin razones. Evitar el experimento de Asch: se verá en la sesión 10.</a:t>
             </a:r>
           </a:p>
         </p:txBody>
@@ -5325,149 +5532,6 @@
                 </a:solidFill>
                 <a:latin typeface="Nunito Sans"/>
               </a:rPr>
-              <a:t>VÍDEO</a:t>
-            </a:r>
-          </a:p>
-        </p:txBody>
-      </p:sp>
-      <p:sp>
-        <p:nvSpPr>
-          <p:cNvPr id="3" name="TextBox 2"/>
-          <p:cNvSpPr txBox="1"/>
-          <p:nvPr/>
-        </p:nvSpPr>
-        <p:spPr>
-          <a:xfrm>
-            <a:off x="640000" y="760000"/>
-            <a:ext cx="10912000" cy="800000"/>
-          </a:xfrm>
-          <a:prstGeom prst="rect">
-            <a:avLst/>
-          </a:prstGeom>
-          <a:noFill/>
-        </p:spPr>
-        <p:txBody>
-          <a:bodyPr wrap="square">
-            <a:spAutoFit/>
-          </a:bodyPr>
-          <a:lstStyle/>
-          <a:p>
-            <a:pPr>
-              <a:spcAft>
-                <a:spcPts val="1620"/>
-              </a:spcAft>
-            </a:pPr>
-            <a:r>
-              <a:rPr sz="3600" b="1">
-                <a:solidFill>
-                  <a:srgbClr val="FBF7EF"/>
-                </a:solidFill>
-                <a:latin typeface="Fredoka"/>
-              </a:rPr>
-              <a:t>Diferencia entre creer y saber (el conocimiento como creencia verdadera con buenas razones)</a:t>
-            </a:r>
-          </a:p>
-        </p:txBody>
-      </p:sp>
-      <p:sp>
-        <p:nvSpPr>
-          <p:cNvPr id="4" name="TextBox 3"/>
-          <p:cNvSpPr txBox="1"/>
-          <p:nvPr/>
-        </p:nvSpPr>
-        <p:spPr>
-          <a:xfrm>
-            <a:off x="640000" y="2200000"/>
-            <a:ext cx="10912000" cy="2000000"/>
-          </a:xfrm>
-          <a:prstGeom prst="rect">
-            <a:avLst/>
-          </a:prstGeom>
-          <a:noFill/>
-        </p:spPr>
-        <p:txBody>
-          <a:bodyPr wrap="square">
-            <a:spAutoFit/>
-          </a:bodyPr>
-          <a:lstStyle/>
-          <a:p>
-            <a:pPr>
-              <a:spcAft>
-                <a:spcPts val="1080"/>
-              </a:spcAft>
-            </a:pPr>
-            <a:r>
-              <a:rPr sz="2400" b="0">
-                <a:solidFill>
-                  <a:srgbClr val="C9D3E6"/>
-                </a:solidFill>
-                <a:latin typeface="Nunito Sans"/>
-              </a:rPr>
-              <a:t>Oír otra vez, con otras palabras, que saber necesita verdad y buenas razones, no solo seguridad.</a:t>
-            </a:r>
-          </a:p>
-        </p:txBody>
-      </p:sp>
-    </p:spTree>
-  </p:cSld>
-  <p:clrMapOvr>
-    <a:masterClrMapping/>
-  </p:clrMapOvr>
-</p:sld>
-</file>
-
-<file path=ppt/slides/slide18.xml><?xml version="1.0" encoding="utf-8"?>
-<p:sld xmlns:a="http://schemas.openxmlformats.org/drawingml/2006/main" xmlns:p="http://schemas.openxmlformats.org/presentationml/2006/main" xmlns:r="http://schemas.openxmlformats.org/officeDocument/2006/relationships">
-  <p:cSld>
-    <p:bg>
-      <p:bgPr>
-        <a:solidFill>
-          <a:srgbClr val="1F2A44"/>
-        </a:solidFill>
-        <a:effectLst/>
-      </p:bgPr>
-    </p:bg>
-    <p:spTree>
-      <p:nvGrpSpPr>
-        <p:cNvPr id="1" name=""/>
-        <p:cNvGrpSpPr/>
-        <p:nvPr/>
-      </p:nvGrpSpPr>
-      <p:grpSpPr/>
-      <p:sp>
-        <p:nvSpPr>
-          <p:cNvPr id="2" name="TextBox 1"/>
-          <p:cNvSpPr txBox="1"/>
-          <p:nvPr/>
-        </p:nvSpPr>
-        <p:spPr>
-          <a:xfrm>
-            <a:off x="640000" y="380000"/>
-            <a:ext cx="10912000" cy="420000"/>
-          </a:xfrm>
-          <a:prstGeom prst="rect">
-            <a:avLst/>
-          </a:prstGeom>
-          <a:noFill/>
-        </p:spPr>
-        <p:txBody>
-          <a:bodyPr wrap="square">
-            <a:spAutoFit/>
-          </a:bodyPr>
-          <a:lstStyle/>
-          <a:p>
-            <a:pPr>
-              <a:spcAft>
-                <a:spcPts val="630"/>
-              </a:spcAft>
-            </a:pPr>
-            <a:r>
-              <a:rPr sz="1400" b="1">
-                <a:solidFill>
-                  <a:srgbClr val="F4B183"/>
-                </a:solidFill>
-                <a:latin typeface="Nunito Sans"/>
-              </a:rPr>
               <a:t>AHORA, LA HOJA DEL DÍA</a:t>
             </a:r>
           </a:p>
@@ -6086,7 +6150,7 @@
                 </a:solidFill>
                 <a:latin typeface="Nunito Sans"/>
               </a:rPr>
-              <a:t>Una afirmación de hecho dice cómo son las ______.  (sesión 2)</a:t>
+              <a:t>Ante una opinión, me pregunto qué ______ quien la dice.  (sesión 2)</a:t>
             </a:r>
           </a:p>
           <a:p>
@@ -6306,7 +6370,7 @@
                 </a:solidFill>
                 <a:latin typeface="Nunito Sans"/>
               </a:rPr>
-              <a:t>Una afirmación de hecho dice cómo son las </a:t>
+              <a:t>Ante una opinión, me pregunto qué </a:t>
             </a:r>
             <a:r>
               <a:rPr sz="2600" b="1">
@@ -6315,7 +6379,7 @@
                 </a:solidFill>
                 <a:latin typeface="Nunito Sans"/>
               </a:rPr>
-              <a:t>cosas</a:t>
+              <a:t>gana</a:t>
             </a:r>
             <a:r>
               <a:rPr sz="2600" b="0">
@@ -6324,7 +6388,7 @@
                 </a:solidFill>
                 <a:latin typeface="Nunito Sans"/>
               </a:rPr>
-              <a:t>.  (sesión 2)</a:t>
+              <a:t> quien la dice.  (sesión 2)</a:t>
             </a:r>
           </a:p>
           <a:p>
@@ -6532,7 +6596,7 @@
                 </a:solidFill>
                 <a:latin typeface="Nunito Sans"/>
               </a:rPr>
-              <a:t>Un chico está segurísimo de que dejó las llaves en la mochila. Las busca… y no están.</a:t>
+              <a:t>Todos en la clase de una chica llevan las mismas zapatillas. Sin darse cuenta, ella empieza a pensar que son las mejores.</a:t>
             </a:r>
           </a:p>
         </p:txBody>
@@ -6571,7 +6635,7 @@
                 </a:solidFill>
                 <a:latin typeface="Nunito Sans"/>
               </a:rPr>
-              <a:t>¿Ese chico sabía dónde estaban las llaves, o solo lo creía?</a:t>
+              <a:t>¿Lo piensa por una razón… o por otra cosa?</a:t>
             </a:r>
           </a:p>
         </p:txBody>
@@ -6675,7 +6739,7 @@
                 </a:solidFill>
                 <a:latin typeface="Fredoka"/>
               </a:rPr>
-              <a:t>Tres palabras que se confunden</a:t>
+              <a:t>Cuatro caminos para creer</a:t>
             </a:r>
           </a:p>
         </p:txBody>
@@ -6740,7 +6804,7 @@
                 </a:solidFill>
                 <a:latin typeface="Nunito Sans"/>
               </a:rPr>
-              <a:t>BLOQUE 1 · TRES PALABRAS QUE SE CONFUNDEN</a:t>
+              <a:t>BLOQUE 1 · CUATRO CAMINOS PARA CREER</a:t>
             </a:r>
           </a:p>
         </p:txBody>
@@ -6779,57 +6843,14 @@
                 </a:solidFill>
                 <a:latin typeface="Fredoka"/>
               </a:rPr>
-              <a:t>Creer</a:t>
-            </a:r>
-          </a:p>
-        </p:txBody>
-      </p:sp>
-      <p:sp>
-        <p:nvSpPr>
-          <p:cNvPr id="4" name="Rectangle 3"/>
-          <p:cNvSpPr/>
-          <p:nvPr/>
-        </p:nvSpPr>
-        <p:spPr>
-          <a:xfrm>
-            <a:off x="640000" y="1650000"/>
-            <a:ext cx="10912000" cy="1150000"/>
-          </a:xfrm>
-          <a:prstGeom prst="rect">
-            <a:avLst/>
-          </a:prstGeom>
-          <a:solidFill>
-            <a:srgbClr val="EAF0F7"/>
-          </a:solidFill>
-          <a:ln>
-            <a:noFill/>
-          </a:ln>
-        </p:spPr>
-        <p:style>
-          <a:lnRef idx="1">
-            <a:schemeClr val="accent1"/>
-          </a:lnRef>
-          <a:fillRef idx="3">
-            <a:schemeClr val="accent1"/>
-          </a:fillRef>
-          <a:effectRef idx="2">
-            <a:schemeClr val="accent1"/>
-          </a:effectRef>
-          <a:fontRef idx="minor">
-            <a:schemeClr val="lt1"/>
-          </a:fontRef>
-        </p:style>
-        <p:txBody>
-          <a:bodyPr rtlCol="0" anchor="ctr"/>
-          <a:lstStyle/>
-          <a:p>
-            <a:pPr algn="ctr"/>
-          </a:p>
-        </p:txBody>
-      </p:sp>
-      <p:sp>
-        <p:nvSpPr>
-          <p:cNvPr id="5" name="TextBox 4"/>
+              <a:t>¿De dónde vienen nuestras creencias?</a:t>
+            </a:r>
+          </a:p>
+        </p:txBody>
+      </p:sp>
+      <p:sp>
+        <p:nvSpPr>
+          <p:cNvPr id="4" name="TextBox 3"/>
           <p:cNvSpPr txBox="1"/>
           <p:nvPr/>
         </p:nvSpPr>
@@ -6851,42 +6872,24 @@
           <a:p>
             <a:pPr>
               <a:spcAft>
-                <a:spcPts val="1260"/>
-              </a:spcAft>
-            </a:pPr>
-            <a:r>
-              <a:rPr sz="2800" b="1">
+                <a:spcPts val="1080"/>
+              </a:spcAft>
+            </a:pPr>
+            <a:r>
+              <a:rPr sz="2400" b="0">
                 <a:solidFill>
                   <a:srgbClr val="1F2A44"/>
                 </a:solidFill>
                 <a:latin typeface="Nunito Sans"/>
               </a:rPr>
-              <a:t>Creer es pensar que algo es </a:t>
-            </a:r>
-            <a:r>
-              <a:rPr sz="2800" b="1">
-                <a:solidFill>
-                  <a:srgbClr val="1F2A44"/>
-                </a:solidFill>
-                <a:latin typeface="Nunito Sans"/>
-              </a:rPr>
-              <a:t>verdad</a:t>
-            </a:r>
-            <a:r>
-              <a:rPr sz="2800" b="1">
-                <a:solidFill>
-                  <a:srgbClr val="1F2A44"/>
-                </a:solidFill>
-                <a:latin typeface="Nunito Sans"/>
-              </a:rPr>
-              <a:t>. Lo que creo puede ser verdad… o no.</a:t>
-            </a:r>
-          </a:p>
-        </p:txBody>
-      </p:sp>
-      <p:sp>
-        <p:nvSpPr>
-          <p:cNvPr id="6" name="TextBox 5"/>
+              <a:t>Muchas cosas las creemos sin mirar sus razones. Hay cuatro caminos:</a:t>
+            </a:r>
+          </a:p>
+        </p:txBody>
+      </p:sp>
+      <p:sp>
+        <p:nvSpPr>
+          <p:cNvPr id="5" name="TextBox 4"/>
           <p:cNvSpPr txBox="1"/>
           <p:nvPr/>
         </p:nvSpPr>
@@ -6921,13 +6924,22 @@
               <a:t>• </a:t>
             </a:r>
             <a:r>
+              <a:rPr sz="2800" b="1">
+                <a:solidFill>
+                  <a:srgbClr val="1F2A44"/>
+                </a:solidFill>
+                <a:latin typeface="Nunito Sans"/>
+              </a:rPr>
+              <a:t>Costumbre:</a:t>
+            </a:r>
+            <a:r>
               <a:rPr sz="2800" b="0">
                 <a:solidFill>
                   <a:srgbClr val="1F2A44"/>
                 </a:solidFill>
                 <a:latin typeface="Nunito Sans"/>
               </a:rPr>
-              <a:t>«Creo que mañana lloverá»</a:t>
+              <a:t> «siempre se ha hecho así»</a:t>
             </a:r>
           </a:p>
           <a:p>
@@ -6946,13 +6958,22 @@
               <a:t>• </a:t>
             </a:r>
             <a:r>
+              <a:rPr sz="2800" b="1">
+                <a:solidFill>
+                  <a:srgbClr val="1F2A44"/>
+                </a:solidFill>
+                <a:latin typeface="Nunito Sans"/>
+              </a:rPr>
+              <a:t>Grupo:</a:t>
+            </a:r>
+            <a:r>
               <a:rPr sz="2800" b="0">
                 <a:solidFill>
                   <a:srgbClr val="1F2A44"/>
                 </a:solidFill>
                 <a:latin typeface="Nunito Sans"/>
               </a:rPr>
-              <a:t>Todos creemos muchas cosas sin comprobarlas</a:t>
+              <a:t> «lo cree toda mi cuadrilla»</a:t>
             </a:r>
           </a:p>
           <a:p>
@@ -6971,13 +6992,56 @@
               <a:t>• </a:t>
             </a:r>
             <a:r>
+              <a:rPr sz="2800" b="1">
+                <a:solidFill>
+                  <a:srgbClr val="1F2A44"/>
+                </a:solidFill>
+                <a:latin typeface="Nunito Sans"/>
+              </a:rPr>
+              <a:t>Autoridad:</a:t>
+            </a:r>
+            <a:r>
               <a:rPr sz="2800" b="0">
                 <a:solidFill>
                   <a:srgbClr val="1F2A44"/>
                 </a:solidFill>
                 <a:latin typeface="Nunito Sans"/>
               </a:rPr>
-              <a:t>Creer no es malo: lo malo es no revisar nunca</a:t>
+              <a:t> «lo ha dicho alguien importante»</a:t>
+            </a:r>
+          </a:p>
+          <a:p>
+            <a:pPr>
+              <a:spcAft>
+                <a:spcPts val="1260"/>
+              </a:spcAft>
+            </a:pPr>
+            <a:r>
+              <a:rPr sz="2800" b="1">
+                <a:solidFill>
+                  <a:srgbClr val="E8793A"/>
+                </a:solidFill>
+                <a:latin typeface="Nunito Sans"/>
+              </a:rPr>
+              <a:t>• </a:t>
+            </a:r>
+            <a:r>
+              <a:rPr sz="2800" b="1">
+                <a:solidFill>
+                  <a:srgbClr val="1F2A44"/>
+                </a:solidFill>
+                <a:latin typeface="Nunito Sans"/>
+              </a:rPr>
+              <a:t>Emoción:</a:t>
+            </a:r>
+            <a:r>
+              <a:rPr sz="2800" b="0">
+                <a:solidFill>
+                  <a:srgbClr val="1F2A44"/>
+                </a:solidFill>
+                <a:latin typeface="Nunito Sans"/>
+              </a:rPr>
+              <a:t> «me gusta creerlo» o «me da miedo»</a:t>
             </a:r>
           </a:p>
         </p:txBody>
@@ -7042,7 +7106,7 @@
                 </a:solidFill>
                 <a:latin typeface="Nunito Sans"/>
               </a:rPr>
-              <a:t>BLOQUE 1 · TRES PALABRAS QUE SE CONFUNDEN</a:t>
+              <a:t>BLOQUE 1 · CUATRO CAMINOS PARA CREER</a:t>
             </a:r>
           </a:p>
         </p:txBody>
@@ -7081,227 +7145,378 @@
                 </a:solidFill>
                 <a:latin typeface="Fredoka"/>
               </a:rPr>
-              <a:t>Saber</a:t>
-            </a:r>
-          </a:p>
-        </p:txBody>
-      </p:sp>
-      <p:sp>
-        <p:nvSpPr>
-          <p:cNvPr id="4" name="Rectangle 3"/>
-          <p:cNvSpPr/>
+              <a:t>Los cuatro caminos, con ejemplos</a:t>
+            </a:r>
+          </a:p>
+        </p:txBody>
+      </p:sp>
+      <p:graphicFrame>
+        <p:nvGraphicFramePr>
+          <p:cNvPr id="4" name="Table 3"/>
+          <p:cNvGraphicFramePr>
+            <a:graphicFrameLocks noGrp="1"/>
+          </p:cNvGraphicFramePr>
           <p:nvPr/>
-        </p:nvSpPr>
-        <p:spPr>
-          <a:xfrm>
-            <a:off x="640000" y="1650000"/>
-            <a:ext cx="10912000" cy="1150000"/>
-          </a:xfrm>
-          <a:prstGeom prst="rect">
-            <a:avLst/>
-          </a:prstGeom>
-          <a:solidFill>
-            <a:srgbClr val="EAF0F7"/>
-          </a:solidFill>
-          <a:ln>
-            <a:noFill/>
-          </a:ln>
-        </p:spPr>
-        <p:style>
-          <a:lnRef idx="1">
-            <a:schemeClr val="accent1"/>
-          </a:lnRef>
-          <a:fillRef idx="3">
-            <a:schemeClr val="accent1"/>
-          </a:fillRef>
-          <a:effectRef idx="2">
-            <a:schemeClr val="accent1"/>
-          </a:effectRef>
-          <a:fontRef idx="minor">
-            <a:schemeClr val="lt1"/>
-          </a:fontRef>
-        </p:style>
-        <p:txBody>
-          <a:bodyPr rtlCol="0" anchor="ctr"/>
-          <a:lstStyle/>
-          <a:p>
-            <a:pPr algn="ctr"/>
-          </a:p>
-        </p:txBody>
-      </p:sp>
-      <p:sp>
-        <p:nvSpPr>
-          <p:cNvPr id="5" name="TextBox 4"/>
-          <p:cNvSpPr txBox="1"/>
-          <p:nvPr/>
-        </p:nvSpPr>
-        <p:spPr>
-          <a:xfrm>
-            <a:off x="840000" y="1730000"/>
-            <a:ext cx="10512000" cy="1000000"/>
-          </a:xfrm>
-          <a:prstGeom prst="rect">
-            <a:avLst/>
-          </a:prstGeom>
-          <a:noFill/>
-        </p:spPr>
-        <p:txBody>
-          <a:bodyPr wrap="square" anchor="ctr">
-            <a:spAutoFit/>
-          </a:bodyPr>
-          <a:lstStyle/>
-          <a:p>
-            <a:pPr>
-              <a:spcAft>
-                <a:spcPts val="1260"/>
-              </a:spcAft>
-            </a:pPr>
-            <a:r>
-              <a:rPr sz="2800" b="1">
-                <a:solidFill>
-                  <a:srgbClr val="1F2A44"/>
-                </a:solidFill>
-                <a:latin typeface="Nunito Sans"/>
-              </a:rPr>
-              <a:t>Solemos decir que alguien </a:t>
-            </a:r>
-            <a:r>
-              <a:rPr sz="2800" b="1">
-                <a:solidFill>
-                  <a:srgbClr val="1F2A44"/>
-                </a:solidFill>
-                <a:latin typeface="Nunito Sans"/>
-              </a:rPr>
-              <a:t>sabe</a:t>
-            </a:r>
-            <a:r>
-              <a:rPr sz="2800" b="1">
-                <a:solidFill>
-                  <a:srgbClr val="1F2A44"/>
-                </a:solidFill>
-                <a:latin typeface="Nunito Sans"/>
-              </a:rPr>
-              <a:t> algo cuando lo cree, es verdad y tiene </a:t>
-            </a:r>
-            <a:r>
-              <a:rPr sz="2800" b="1">
-                <a:solidFill>
-                  <a:srgbClr val="1F2A44"/>
-                </a:solidFill>
-                <a:latin typeface="Nunito Sans"/>
-              </a:rPr>
-              <a:t>buenas razones</a:t>
-            </a:r>
-            <a:r>
-              <a:rPr sz="2800" b="1">
-                <a:solidFill>
-                  <a:srgbClr val="1F2A44"/>
-                </a:solidFill>
-                <a:latin typeface="Nunito Sans"/>
-              </a:rPr>
-              <a:t>.</a:t>
-            </a:r>
-          </a:p>
-        </p:txBody>
-      </p:sp>
-      <p:sp>
-        <p:nvSpPr>
-          <p:cNvPr id="6" name="TextBox 5"/>
-          <p:cNvSpPr txBox="1"/>
-          <p:nvPr/>
-        </p:nvSpPr>
-        <p:spPr>
-          <a:xfrm>
-            <a:off x="640000" y="3000000"/>
-            <a:ext cx="10912000" cy="3458000"/>
-          </a:xfrm>
-          <a:prstGeom prst="rect">
-            <a:avLst/>
-          </a:prstGeom>
-          <a:noFill/>
-        </p:spPr>
-        <p:txBody>
-          <a:bodyPr wrap="square">
-            <a:spAutoFit/>
-          </a:bodyPr>
-          <a:lstStyle/>
-          <a:p>
-            <a:pPr>
-              <a:spcAft>
-                <a:spcPts val="1260"/>
-              </a:spcAft>
-            </a:pPr>
-            <a:r>
-              <a:rPr sz="2800" b="1">
-                <a:solidFill>
-                  <a:srgbClr val="E8793A"/>
-                </a:solidFill>
-                <a:latin typeface="Nunito Sans"/>
-              </a:rPr>
-              <a:t>• </a:t>
-            </a:r>
-            <a:r>
-              <a:rPr sz="2800" b="0">
-                <a:solidFill>
-                  <a:srgbClr val="1F2A44"/>
-                </a:solidFill>
-                <a:latin typeface="Nunito Sans"/>
-              </a:rPr>
-              <a:t>Si era falso, no lo sabía: solo lo creía</a:t>
-            </a:r>
-          </a:p>
-          <a:p>
-            <a:pPr>
-              <a:spcAft>
-                <a:spcPts val="1260"/>
-              </a:spcAft>
-            </a:pPr>
-            <a:r>
-              <a:rPr sz="2800" b="1">
-                <a:solidFill>
-                  <a:srgbClr val="E8793A"/>
-                </a:solidFill>
-                <a:latin typeface="Nunito Sans"/>
-              </a:rPr>
-              <a:t>• </a:t>
-            </a:r>
-            <a:r>
-              <a:rPr sz="2800" b="0">
-                <a:solidFill>
-                  <a:srgbClr val="1F2A44"/>
-                </a:solidFill>
-                <a:latin typeface="Nunito Sans"/>
-              </a:rPr>
-              <a:t>Si acierto por suerte, tampoco lo sé</a:t>
-            </a:r>
-          </a:p>
-          <a:p>
-            <a:pPr>
-              <a:spcAft>
-                <a:spcPts val="1260"/>
-              </a:spcAft>
-            </a:pPr>
-            <a:r>
-              <a:rPr sz="2800" b="1">
-                <a:solidFill>
-                  <a:srgbClr val="E8793A"/>
-                </a:solidFill>
-                <a:latin typeface="Nunito Sans"/>
-              </a:rPr>
-              <a:t>• </a:t>
-            </a:r>
-            <a:r>
-              <a:rPr sz="2800" b="0">
-                <a:solidFill>
-                  <a:srgbClr val="1F2A44"/>
-                </a:solidFill>
-                <a:latin typeface="Nunito Sans"/>
-              </a:rPr>
-              <a:t>Los filósofos llevan siglos discutiendo esta definición</a:t>
-            </a:r>
-          </a:p>
-        </p:txBody>
-      </p:sp>
+        </p:nvGraphicFramePr>
+        <p:xfrm>
+          <a:off x="640000" y="1700000"/>
+          <a:ext cx="10912000" cy="3000000"/>
+        </p:xfrm>
+        <a:graphic>
+          <a:graphicData uri="http://schemas.openxmlformats.org/drawingml/2006/table">
+            <a:tbl>
+              <a:tblPr firstRow="1" bandRow="1">
+                <a:tableStyleId>{5C22544A-7EE6-4342-B048-85BDC9FD1C3A}</a:tableStyleId>
+              </a:tblPr>
+              <a:tblGrid>
+                <a:gridCol w="3637333"/>
+                <a:gridCol w="3637333"/>
+                <a:gridCol w="3637334"/>
+              </a:tblGrid>
+              <a:tr h="600000">
+                <a:tc>
+                  <a:txBody>
+                    <a:bodyPr/>
+                    <a:lstStyle/>
+                    <a:p>
+                      <a:r>
+                        <a:rPr sz="2000" b="1">
+                          <a:solidFill>
+                            <a:srgbClr val="FBF7EF"/>
+                          </a:solidFill>
+                          <a:latin typeface="Fredoka"/>
+                        </a:rPr>
+                        <a:t>Camino</a:t>
+                      </a:r>
+                    </a:p>
+                  </a:txBody>
+                  <a:tcPr>
+                    <a:solidFill>
+                      <a:srgbClr val="1F2A44"/>
+                    </a:solidFill>
+                  </a:tcPr>
+                </a:tc>
+                <a:tc>
+                  <a:txBody>
+                    <a:bodyPr/>
+                    <a:lstStyle/>
+                    <a:p>
+                      <a:r>
+                        <a:rPr sz="2000" b="1">
+                          <a:solidFill>
+                            <a:srgbClr val="FBF7EF"/>
+                          </a:solidFill>
+                          <a:latin typeface="Fredoka"/>
+                        </a:rPr>
+                        <a:t>Ejemplo</a:t>
+                      </a:r>
+                    </a:p>
+                  </a:txBody>
+                  <a:tcPr>
+                    <a:solidFill>
+                      <a:srgbClr val="1F2A44"/>
+                    </a:solidFill>
+                  </a:tcPr>
+                </a:tc>
+                <a:tc>
+                  <a:txBody>
+                    <a:bodyPr/>
+                    <a:lstStyle/>
+                    <a:p>
+                      <a:r>
+                        <a:rPr sz="2000" b="1">
+                          <a:solidFill>
+                            <a:srgbClr val="FBF7EF"/>
+                          </a:solidFill>
+                          <a:latin typeface="Fredoka"/>
+                        </a:rPr>
+                        <a:t>Pregunta para revisarla</a:t>
+                      </a:r>
+                    </a:p>
+                  </a:txBody>
+                  <a:tcPr>
+                    <a:solidFill>
+                      <a:srgbClr val="1F2A44"/>
+                    </a:solidFill>
+                  </a:tcPr>
+                </a:tc>
+              </a:tr>
+              <a:tr h="600000">
+                <a:tc>
+                  <a:txBody>
+                    <a:bodyPr/>
+                    <a:lstStyle/>
+                    <a:p>
+                      <a:r>
+                        <a:rPr sz="2000" b="1">
+                          <a:solidFill>
+                            <a:srgbClr val="1F2A44"/>
+                          </a:solidFill>
+                          <a:latin typeface="Nunito Sans"/>
+                        </a:rPr>
+                        <a:t>Costumbre</a:t>
+                      </a:r>
+                    </a:p>
+                  </a:txBody>
+                  <a:tcPr>
+                    <a:solidFill>
+                      <a:srgbClr val="FFFFFF"/>
+                    </a:solidFill>
+                  </a:tcPr>
+                </a:tc>
+                <a:tc>
+                  <a:txBody>
+                    <a:bodyPr/>
+                    <a:lstStyle/>
+                    <a:p>
+                      <a:r>
+                        <a:rPr sz="2000" b="0">
+                          <a:solidFill>
+                            <a:srgbClr val="1F2A44"/>
+                          </a:solidFill>
+                          <a:latin typeface="Nunito Sans"/>
+                        </a:rPr>
+                        <a:t>«Se hace así porque siempre se ha hecho así»</a:t>
+                      </a:r>
+                    </a:p>
+                  </a:txBody>
+                  <a:tcPr>
+                    <a:solidFill>
+                      <a:srgbClr val="FFFFFF"/>
+                    </a:solidFill>
+                  </a:tcPr>
+                </a:tc>
+                <a:tc>
+                  <a:txBody>
+                    <a:bodyPr/>
+                    <a:lstStyle/>
+                    <a:p>
+                      <a:r>
+                        <a:rPr sz="2000" b="0">
+                          <a:solidFill>
+                            <a:srgbClr val="1F2A44"/>
+                          </a:solidFill>
+                          <a:latin typeface="Nunito Sans"/>
+                        </a:rPr>
+                        <a:t>¿Hay alguna razón, o solo es costumbre?</a:t>
+                      </a:r>
+                    </a:p>
+                  </a:txBody>
+                  <a:tcPr>
+                    <a:solidFill>
+                      <a:srgbClr val="FFFFFF"/>
+                    </a:solidFill>
+                  </a:tcPr>
+                </a:tc>
+              </a:tr>
+              <a:tr h="600000">
+                <a:tc>
+                  <a:txBody>
+                    <a:bodyPr/>
+                    <a:lstStyle/>
+                    <a:p>
+                      <a:r>
+                        <a:rPr sz="2000" b="1">
+                          <a:solidFill>
+                            <a:srgbClr val="1F2A44"/>
+                          </a:solidFill>
+                          <a:latin typeface="Nunito Sans"/>
+                        </a:rPr>
+                        <a:t>Grupo</a:t>
+                      </a:r>
+                    </a:p>
+                  </a:txBody>
+                  <a:tcPr>
+                    <a:solidFill>
+                      <a:srgbClr val="EAF0F7"/>
+                    </a:solidFill>
+                  </a:tcPr>
+                </a:tc>
+                <a:tc>
+                  <a:txBody>
+                    <a:bodyPr/>
+                    <a:lstStyle/>
+                    <a:p>
+                      <a:r>
+                        <a:rPr sz="2000" b="0">
+                          <a:solidFill>
+                            <a:srgbClr val="1F2A44"/>
+                          </a:solidFill>
+                          <a:latin typeface="Nunito Sans"/>
+                        </a:rPr>
+                        <a:t>«Esa serie es malísima: lo dicen todos mis amigos»</a:t>
+                      </a:r>
+                    </a:p>
+                  </a:txBody>
+                  <a:tcPr>
+                    <a:solidFill>
+                      <a:srgbClr val="EAF0F7"/>
+                    </a:solidFill>
+                  </a:tcPr>
+                </a:tc>
+                <a:tc>
+                  <a:txBody>
+                    <a:bodyPr/>
+                    <a:lstStyle/>
+                    <a:p>
+                      <a:r>
+                        <a:rPr sz="2000" b="0">
+                          <a:solidFill>
+                            <a:srgbClr val="1F2A44"/>
+                          </a:solidFill>
+                          <a:latin typeface="Nunito Sans"/>
+                        </a:rPr>
+                        <a:t>¿La he visto yo?</a:t>
+                      </a:r>
+                    </a:p>
+                  </a:txBody>
+                  <a:tcPr>
+                    <a:solidFill>
+                      <a:srgbClr val="EAF0F7"/>
+                    </a:solidFill>
+                  </a:tcPr>
+                </a:tc>
+              </a:tr>
+              <a:tr h="600000">
+                <a:tc>
+                  <a:txBody>
+                    <a:bodyPr/>
+                    <a:lstStyle/>
+                    <a:p>
+                      <a:r>
+                        <a:rPr sz="2000" b="1">
+                          <a:solidFill>
+                            <a:srgbClr val="1F2A44"/>
+                          </a:solidFill>
+                          <a:latin typeface="Nunito Sans"/>
+                        </a:rPr>
+                        <a:t>Autoridad</a:t>
+                      </a:r>
+                    </a:p>
+                  </a:txBody>
+                  <a:tcPr>
+                    <a:solidFill>
+                      <a:srgbClr val="FFFFFF"/>
+                    </a:solidFill>
+                  </a:tcPr>
+                </a:tc>
+                <a:tc>
+                  <a:txBody>
+                    <a:bodyPr/>
+                    <a:lstStyle/>
+                    <a:p>
+                      <a:r>
+                        <a:rPr sz="2000" b="0">
+                          <a:solidFill>
+                            <a:srgbClr val="1F2A44"/>
+                          </a:solidFill>
+                          <a:latin typeface="Nunito Sans"/>
+                        </a:rPr>
+                        <a:t>«Lo dice un youtuber con millones de seguidores»</a:t>
+                      </a:r>
+                    </a:p>
+                  </a:txBody>
+                  <a:tcPr>
+                    <a:solidFill>
+                      <a:srgbClr val="FFFFFF"/>
+                    </a:solidFill>
+                  </a:tcPr>
+                </a:tc>
+                <a:tc>
+                  <a:txBody>
+                    <a:bodyPr/>
+                    <a:lstStyle/>
+                    <a:p>
+                      <a:r>
+                        <a:rPr sz="2000" b="0">
+                          <a:solidFill>
+                            <a:srgbClr val="1F2A44"/>
+                          </a:solidFill>
+                          <a:latin typeface="Nunito Sans"/>
+                        </a:rPr>
+                        <a:t>¿Sabe de ese tema?</a:t>
+                      </a:r>
+                    </a:p>
+                  </a:txBody>
+                  <a:tcPr>
+                    <a:solidFill>
+                      <a:srgbClr val="FFFFFF"/>
+                    </a:solidFill>
+                  </a:tcPr>
+                </a:tc>
+              </a:tr>
+              <a:tr h="600000">
+                <a:tc>
+                  <a:txBody>
+                    <a:bodyPr/>
+                    <a:lstStyle/>
+                    <a:p>
+                      <a:r>
+                        <a:rPr sz="2000" b="1">
+                          <a:solidFill>
+                            <a:srgbClr val="1F2A44"/>
+                          </a:solidFill>
+                          <a:latin typeface="Nunito Sans"/>
+                        </a:rPr>
+                        <a:t>Emoción</a:t>
+                      </a:r>
+                    </a:p>
+                  </a:txBody>
+                  <a:tcPr>
+                    <a:solidFill>
+                      <a:srgbClr val="EAF0F7"/>
+                    </a:solidFill>
+                  </a:tcPr>
+                </a:tc>
+                <a:tc>
+                  <a:txBody>
+                    <a:bodyPr/>
+                    <a:lstStyle/>
+                    <a:p>
+                      <a:r>
+                        <a:rPr sz="2000" b="0">
+                          <a:solidFill>
+                            <a:srgbClr val="1F2A44"/>
+                          </a:solidFill>
+                          <a:latin typeface="Nunito Sans"/>
+                        </a:rPr>
+                        <a:t>«No ha sido falta: es mi equipo»</a:t>
+                      </a:r>
+                    </a:p>
+                  </a:txBody>
+                  <a:tcPr>
+                    <a:solidFill>
+                      <a:srgbClr val="EAF0F7"/>
+                    </a:solidFill>
+                  </a:tcPr>
+                </a:tc>
+                <a:tc>
+                  <a:txBody>
+                    <a:bodyPr/>
+                    <a:lstStyle/>
+                    <a:p>
+                      <a:r>
+                        <a:rPr sz="2000" b="0">
+                          <a:solidFill>
+                            <a:srgbClr val="1F2A44"/>
+                          </a:solidFill>
+                          <a:latin typeface="Nunito Sans"/>
+                        </a:rPr>
+                        <a:t>¿Diría lo mismo si fuera el otro equipo?</a:t>
+                      </a:r>
+                    </a:p>
+                  </a:txBody>
+                  <a:tcPr>
+                    <a:solidFill>
+                      <a:srgbClr val="EAF0F7"/>
+                    </a:solidFill>
+                  </a:tcPr>
+                </a:tc>
+              </a:tr>
+            </a:tbl>
+          </a:graphicData>
+        </a:graphic>
+      </p:graphicFrame>
     </p:spTree>
   </p:cSld>
   <p:clrMapOvr>
@@ -7362,7 +7577,7 @@
                 </a:solidFill>
                 <a:latin typeface="Nunito Sans"/>
               </a:rPr>
-              <a:t>BLOQUE 1 · TRES PALABRAS QUE SE CONFUNDEN</a:t>
+              <a:t>BLOQUE 1 · CUATRO CAMINOS PARA CREER</a:t>
             </a:r>
           </a:p>
         </p:txBody>
@@ -7401,7 +7616,7 @@
                 </a:solidFill>
                 <a:latin typeface="Fredoka"/>
               </a:rPr>
-              <a:t>Estar seguro</a:t>
+              <a:t>¿Son siempre malos estos caminos?</a:t>
             </a:r>
           </a:p>
         </p:txBody>
@@ -7415,13 +7630,13 @@
         <p:spPr>
           <a:xfrm>
             <a:off x="640000" y="1650000"/>
-            <a:ext cx="10912000" cy="1150000"/>
+            <a:ext cx="5306000" cy="4400000"/>
           </a:xfrm>
           <a:prstGeom prst="rect">
             <a:avLst/>
           </a:prstGeom>
           <a:solidFill>
-            <a:srgbClr val="EAF0F7"/>
+            <a:srgbClr val="FBE3D2"/>
           </a:solidFill>
           <a:ln>
             <a:noFill/>
@@ -7457,8 +7672,8 @@
         </p:nvSpPr>
         <p:spPr>
           <a:xfrm>
-            <a:off x="840000" y="1730000"/>
-            <a:ext cx="10512000" cy="1000000"/>
+            <a:off x="840000" y="1750000"/>
+            <a:ext cx="4906000" cy="600000"/>
           </a:xfrm>
           <a:prstGeom prst="rect">
             <a:avLst/>
@@ -7466,7 +7681,7 @@
           <a:noFill/>
         </p:spPr>
         <p:txBody>
-          <a:bodyPr wrap="square" anchor="ctr">
+          <a:bodyPr wrap="square">
             <a:spAutoFit/>
           </a:bodyPr>
           <a:lstStyle/>
@@ -7479,20 +7694,11 @@
             <a:r>
               <a:rPr sz="2800" b="1">
                 <a:solidFill>
-                  <a:srgbClr val="1F2A44"/>
-                </a:solidFill>
-                <a:latin typeface="Nunito Sans"/>
-              </a:rPr>
-              <a:t>Sentirse</a:t>
-            </a:r>
-            <a:r>
-              <a:rPr sz="2800" b="1">
-                <a:solidFill>
-                  <a:srgbClr val="1F2A44"/>
-                </a:solidFill>
-                <a:latin typeface="Nunito Sans"/>
-              </a:rPr>
-              <a:t> seguro es un sentimiento: la sensación de que no me equivoco.</a:t>
+                  <a:srgbClr val="C2531C"/>
+                </a:solidFill>
+                <a:latin typeface="Nunito Sans"/>
+              </a:rPr>
+              <a:t>Error</a:t>
             </a:r>
           </a:p>
         </p:txBody>
@@ -7505,8 +7711,8 @@
         </p:nvSpPr>
         <p:spPr>
           <a:xfrm>
-            <a:off x="640000" y="3000000"/>
-            <a:ext cx="10912000" cy="3458000"/>
+            <a:off x="840000" y="2400000"/>
+            <a:ext cx="4906000" cy="3500000"/>
           </a:xfrm>
           <a:prstGeom prst="rect">
             <a:avLst/>
@@ -7521,12 +7727,192 @@
           <a:p>
             <a:pPr>
               <a:spcAft>
+                <a:spcPts val="1170"/>
+              </a:spcAft>
+            </a:pPr>
+            <a:r>
+              <a:rPr sz="2600" b="1">
+                <a:solidFill>
+                  <a:srgbClr val="E8793A"/>
+                </a:solidFill>
+                <a:latin typeface="Nunito Sans"/>
+              </a:rPr>
+              <a:t>• </a:t>
+            </a:r>
+            <a:r>
+              <a:rPr sz="2600" b="0">
+                <a:solidFill>
+                  <a:srgbClr val="1F2A44"/>
+                </a:solidFill>
+                <a:latin typeface="Nunito Sans"/>
+              </a:rPr>
+              <a:t>«Si lo cree el grupo, es falso»</a:t>
+            </a:r>
+          </a:p>
+          <a:p>
+            <a:pPr>
+              <a:spcAft>
+                <a:spcPts val="1170"/>
+              </a:spcAft>
+            </a:pPr>
+            <a:r>
+              <a:rPr sz="2600" b="1">
+                <a:solidFill>
+                  <a:srgbClr val="E8793A"/>
+                </a:solidFill>
+                <a:latin typeface="Nunito Sans"/>
+              </a:rPr>
+              <a:t>• </a:t>
+            </a:r>
+            <a:r>
+              <a:rPr sz="2600" b="0">
+                <a:solidFill>
+                  <a:srgbClr val="1F2A44"/>
+                </a:solidFill>
+                <a:latin typeface="Nunito Sans"/>
+              </a:rPr>
+              <a:t>«Nunca hay que hacer caso a nadie»</a:t>
+            </a:r>
+          </a:p>
+          <a:p>
+            <a:pPr>
+              <a:spcAft>
+                <a:spcPts val="1170"/>
+              </a:spcAft>
+            </a:pPr>
+            <a:r>
+              <a:rPr sz="2600" b="1">
+                <a:solidFill>
+                  <a:srgbClr val="E8793A"/>
+                </a:solidFill>
+                <a:latin typeface="Nunito Sans"/>
+              </a:rPr>
+              <a:t>• </a:t>
+            </a:r>
+            <a:r>
+              <a:rPr sz="2600" b="0">
+                <a:solidFill>
+                  <a:srgbClr val="1F2A44"/>
+                </a:solidFill>
+                <a:latin typeface="Nunito Sans"/>
+              </a:rPr>
+              <a:t>«Las emociones no sirven para nada»</a:t>
+            </a:r>
+          </a:p>
+        </p:txBody>
+      </p:sp>
+      <p:sp>
+        <p:nvSpPr>
+          <p:cNvPr id="7" name="Rectangle 6"/>
+          <p:cNvSpPr/>
+          <p:nvPr/>
+        </p:nvSpPr>
+        <p:spPr>
+          <a:xfrm>
+            <a:off x="6246000" y="1650000"/>
+            <a:ext cx="5306000" cy="4400000"/>
+          </a:xfrm>
+          <a:prstGeom prst="rect">
+            <a:avLst/>
+          </a:prstGeom>
+          <a:solidFill>
+            <a:srgbClr val="EAF0F7"/>
+          </a:solidFill>
+          <a:ln>
+            <a:noFill/>
+          </a:ln>
+        </p:spPr>
+        <p:style>
+          <a:lnRef idx="1">
+            <a:schemeClr val="accent1"/>
+          </a:lnRef>
+          <a:fillRef idx="3">
+            <a:schemeClr val="accent1"/>
+          </a:fillRef>
+          <a:effectRef idx="2">
+            <a:schemeClr val="accent1"/>
+          </a:effectRef>
+          <a:fontRef idx="minor">
+            <a:schemeClr val="lt1"/>
+          </a:fontRef>
+        </p:style>
+        <p:txBody>
+          <a:bodyPr rtlCol="0" anchor="ctr"/>
+          <a:lstStyle/>
+          <a:p>
+            <a:pPr algn="ctr"/>
+          </a:p>
+        </p:txBody>
+      </p:sp>
+      <p:sp>
+        <p:nvSpPr>
+          <p:cNvPr id="8" name="TextBox 7"/>
+          <p:cNvSpPr txBox="1"/>
+          <p:nvPr/>
+        </p:nvSpPr>
+        <p:spPr>
+          <a:xfrm>
+            <a:off x="6446000" y="1750000"/>
+            <a:ext cx="4906000" cy="600000"/>
+          </a:xfrm>
+          <a:prstGeom prst="rect">
+            <a:avLst/>
+          </a:prstGeom>
+          <a:noFill/>
+        </p:spPr>
+        <p:txBody>
+          <a:bodyPr wrap="square">
+            <a:spAutoFit/>
+          </a:bodyPr>
+          <a:lstStyle/>
+          <a:p>
+            <a:pPr>
+              <a:spcAft>
                 <a:spcPts val="1260"/>
               </a:spcAft>
             </a:pPr>
             <a:r>
               <a:rPr sz="2800" b="1">
                 <a:solidFill>
+                  <a:srgbClr val="2F6FB5"/>
+                </a:solidFill>
+                <a:latin typeface="Nunito Sans"/>
+              </a:rPr>
+              <a:t>Mejor así</a:t>
+            </a:r>
+          </a:p>
+        </p:txBody>
+      </p:sp>
+      <p:sp>
+        <p:nvSpPr>
+          <p:cNvPr id="9" name="TextBox 8"/>
+          <p:cNvSpPr txBox="1"/>
+          <p:nvPr/>
+        </p:nvSpPr>
+        <p:spPr>
+          <a:xfrm>
+            <a:off x="6446000" y="2400000"/>
+            <a:ext cx="4906000" cy="3500000"/>
+          </a:xfrm>
+          <a:prstGeom prst="rect">
+            <a:avLst/>
+          </a:prstGeom>
+          <a:noFill/>
+        </p:spPr>
+        <p:txBody>
+          <a:bodyPr wrap="square">
+            <a:spAutoFit/>
+          </a:bodyPr>
+          <a:lstStyle/>
+          <a:p>
+            <a:pPr>
+              <a:spcAft>
+                <a:spcPts val="1170"/>
+              </a:spcAft>
+            </a:pPr>
+            <a:r>
+              <a:rPr sz="2600" b="1">
+                <a:solidFill>
                   <a:srgbClr val="E8793A"/>
                 </a:solidFill>
                 <a:latin typeface="Nunito Sans"/>
@@ -7534,23 +7920,23 @@
               <a:t>• </a:t>
             </a:r>
             <a:r>
-              <a:rPr sz="2800" b="0">
+              <a:rPr sz="2600" b="0">
                 <a:solidFill>
                   <a:srgbClr val="1F2A44"/>
                 </a:solidFill>
                 <a:latin typeface="Nunito Sans"/>
               </a:rPr>
-              <a:t>Me puedo sentir seguro y estar equivocado</a:t>
-            </a:r>
-          </a:p>
-          <a:p>
-            <a:pPr>
-              <a:spcAft>
-                <a:spcPts val="1260"/>
-              </a:spcAft>
-            </a:pPr>
-            <a:r>
-              <a:rPr sz="2800" b="1">
+              <a:t>Casi todo lo sabemos porque nos lo cuentan</a:t>
+            </a:r>
+          </a:p>
+          <a:p>
+            <a:pPr>
+              <a:spcAft>
+                <a:spcPts val="1170"/>
+              </a:spcAft>
+            </a:pPr>
+            <a:r>
+              <a:rPr sz="2600" b="1">
                 <a:solidFill>
                   <a:srgbClr val="E8793A"/>
                 </a:solidFill>
@@ -7559,23 +7945,41 @@
               <a:t>• </a:t>
             </a:r>
             <a:r>
-              <a:rPr sz="2800" b="0">
+              <a:rPr sz="2600" b="0">
                 <a:solidFill>
                   <a:srgbClr val="1F2A44"/>
                 </a:solidFill>
                 <a:latin typeface="Nunito Sans"/>
               </a:rPr>
-              <a:t>El sentimiento, solo, no es una razón</a:t>
-            </a:r>
-          </a:p>
-          <a:p>
-            <a:pPr>
-              <a:spcAft>
-                <a:spcPts val="1260"/>
-              </a:spcAft>
-            </a:pPr>
-            <a:r>
-              <a:rPr sz="2800" b="1">
+              <a:t>Confiar en quien </a:t>
+            </a:r>
+            <a:r>
+              <a:rPr sz="2600" b="1">
+                <a:solidFill>
+                  <a:srgbClr val="1F2A44"/>
+                </a:solidFill>
+                <a:latin typeface="Nunito Sans"/>
+              </a:rPr>
+              <a:t>sabe del tema</a:t>
+            </a:r>
+            <a:r>
+              <a:rPr sz="2600" b="0">
+                <a:solidFill>
+                  <a:srgbClr val="1F2A44"/>
+                </a:solidFill>
+                <a:latin typeface="Nunito Sans"/>
+              </a:rPr>
+              <a:t> es razonable</a:t>
+            </a:r>
+          </a:p>
+          <a:p>
+            <a:pPr>
+              <a:spcAft>
+                <a:spcPts val="1170"/>
+              </a:spcAft>
+            </a:pPr>
+            <a:r>
+              <a:rPr sz="2600" b="1">
                 <a:solidFill>
                   <a:srgbClr val="E8793A"/>
                 </a:solidFill>
@@ -7584,31 +7988,38 @@
               <a:t>• </a:t>
             </a:r>
             <a:r>
-              <a:rPr sz="2800" b="0">
+              <a:rPr sz="2600" b="0">
                 <a:solidFill>
                   <a:srgbClr val="1F2A44"/>
                 </a:solidFill>
                 <a:latin typeface="Nunito Sans"/>
               </a:rPr>
-              <a:t>Estar seguro </a:t>
-            </a:r>
-            <a:r>
-              <a:rPr sz="2800" b="1">
+              <a:t>Las emociones informan: el miedo avisa de peligros</a:t>
+            </a:r>
+          </a:p>
+          <a:p>
+            <a:pPr>
+              <a:spcAft>
+                <a:spcPts val="1170"/>
+              </a:spcAft>
+            </a:pPr>
+            <a:r>
+              <a:rPr sz="2600" b="1">
+                <a:solidFill>
+                  <a:srgbClr val="E8793A"/>
+                </a:solidFill>
+                <a:latin typeface="Nunito Sans"/>
+              </a:rPr>
+              <a:t>• </a:t>
+            </a:r>
+            <a:r>
+              <a:rPr sz="2600" b="0">
                 <a:solidFill>
                   <a:srgbClr val="1F2A44"/>
                 </a:solidFill>
                 <a:latin typeface="Nunito Sans"/>
               </a:rPr>
-              <a:t>con razones</a:t>
-            </a:r>
-            <a:r>
-              <a:rPr sz="2800" b="0">
-                <a:solidFill>
-                  <a:srgbClr val="1F2A44"/>
-                </a:solidFill>
-                <a:latin typeface="Nunito Sans"/>
-              </a:rPr>
-              <a:t> es otra cosa: «lo he comprobado»</a:t>
+              <a:t>El problema es no revisarlas nunca</a:t>
             </a:r>
           </a:p>
         </p:txBody>
@@ -7627,7 +8038,7 @@
     <p:bg>
       <p:bgPr>
         <a:solidFill>
-          <a:srgbClr val="FBF7EF"/>
+          <a:srgbClr val="1F2A44"/>
         </a:solidFill>
         <a:effectLst/>
       </p:bgPr>
@@ -7647,8 +8058,8 @@
         </p:nvSpPr>
         <p:spPr>
           <a:xfrm>
-            <a:off x="640000" y="380000"/>
-            <a:ext cx="10912000" cy="420000"/>
+            <a:off x="640000" y="2300000"/>
+            <a:ext cx="10912000" cy="500000"/>
           </a:xfrm>
           <a:prstGeom prst="rect">
             <a:avLst/>
@@ -7663,17 +8074,17 @@
           <a:p>
             <a:pPr>
               <a:spcAft>
-                <a:spcPts val="630"/>
-              </a:spcAft>
-            </a:pPr>
-            <a:r>
-              <a:rPr sz="1400" b="1">
-                <a:solidFill>
-                  <a:srgbClr val="E8793A"/>
-                </a:solidFill>
-                <a:latin typeface="Nunito Sans"/>
-              </a:rPr>
-              <a:t>BLOQUE 1 · TRES PALABRAS QUE SE CONFUNDEN</a:t>
+                <a:spcPts val="810"/>
+              </a:spcAft>
+            </a:pPr>
+            <a:r>
+              <a:rPr sz="1800" b="1">
+                <a:solidFill>
+                  <a:srgbClr val="F4B183"/>
+                </a:solidFill>
+                <a:latin typeface="Nunito Sans"/>
+              </a:rPr>
+              <a:t>BLOQUE 2</a:t>
             </a:r>
           </a:p>
         </p:txBody>
@@ -7686,7 +8097,7 @@
         </p:nvSpPr>
         <p:spPr>
           <a:xfrm>
-            <a:off x="640000" y="760000"/>
+            <a:off x="640000" y="2800000"/>
             <a:ext cx="10912000" cy="800000"/>
           </a:xfrm>
           <a:prstGeom prst="rect">
@@ -7702,320 +8113,21 @@
           <a:p>
             <a:pPr>
               <a:spcAft>
-                <a:spcPts val="1710"/>
-              </a:spcAft>
-            </a:pPr>
-            <a:r>
-              <a:rPr sz="3800" b="1">
-                <a:solidFill>
-                  <a:srgbClr val="1F2A44"/>
+                <a:spcPts val="2160"/>
+              </a:spcAft>
+            </a:pPr>
+            <a:r>
+              <a:rPr sz="4800" b="1">
+                <a:solidFill>
+                  <a:srgbClr val="FBF7EF"/>
                 </a:solidFill>
                 <a:latin typeface="Fredoka"/>
               </a:rPr>
-              <a:t>Las tres palabras, juntas</a:t>
-            </a:r>
-          </a:p>
-        </p:txBody>
-      </p:sp>
-      <p:graphicFrame>
-        <p:nvGraphicFramePr>
-          <p:cNvPr id="4" name="Table 3"/>
-          <p:cNvGraphicFramePr>
-            <a:graphicFrameLocks noGrp="1"/>
-          </p:cNvGraphicFramePr>
-          <p:nvPr/>
-        </p:nvGraphicFramePr>
-        <p:xfrm>
-          <a:off x="640000" y="1700000"/>
-          <a:ext cx="10912000" cy="2400000"/>
-        </p:xfrm>
-        <a:graphic>
-          <a:graphicData uri="http://schemas.openxmlformats.org/drawingml/2006/table">
-            <a:tbl>
-              <a:tblPr firstRow="1" bandRow="1">
-                <a:tableStyleId>{5C22544A-7EE6-4342-B048-85BDC9FD1C3A}</a:tableStyleId>
-              </a:tblPr>
-              <a:tblGrid>
-                <a:gridCol w="3637333"/>
-                <a:gridCol w="3637333"/>
-                <a:gridCol w="3637334"/>
-              </a:tblGrid>
-              <a:tr h="600000">
-                <a:tc>
-                  <a:txBody>
-                    <a:bodyPr/>
-                    <a:lstStyle/>
-                    <a:p>
-                      <a:r>
-                        <a:rPr sz="2000" b="1">
-                          <a:solidFill>
-                            <a:srgbClr val="FBF7EF"/>
-                          </a:solidFill>
-                          <a:latin typeface="Fredoka"/>
-                        </a:rPr>
-                        <a:t>Palabra</a:t>
-                      </a:r>
-                    </a:p>
-                  </a:txBody>
-                  <a:tcPr>
-                    <a:solidFill>
-                      <a:srgbClr val="1F2A44"/>
-                    </a:solidFill>
-                  </a:tcPr>
-                </a:tc>
-                <a:tc>
-                  <a:txBody>
-                    <a:bodyPr/>
-                    <a:lstStyle/>
-                    <a:p>
-                      <a:r>
-                        <a:rPr sz="2000" b="1">
-                          <a:solidFill>
-                            <a:srgbClr val="FBF7EF"/>
-                          </a:solidFill>
-                          <a:latin typeface="Fredoka"/>
-                        </a:rPr>
-                        <a:t>Qué es</a:t>
-                      </a:r>
-                    </a:p>
-                  </a:txBody>
-                  <a:tcPr>
-                    <a:solidFill>
-                      <a:srgbClr val="1F2A44"/>
-                    </a:solidFill>
-                  </a:tcPr>
-                </a:tc>
-                <a:tc>
-                  <a:txBody>
-                    <a:bodyPr/>
-                    <a:lstStyle/>
-                    <a:p>
-                      <a:r>
-                        <a:rPr sz="2000" b="1">
-                          <a:solidFill>
-                            <a:srgbClr val="FBF7EF"/>
-                          </a:solidFill>
-                          <a:latin typeface="Fredoka"/>
-                        </a:rPr>
-                        <a:t>¿Puede fallar?</a:t>
-                      </a:r>
-                    </a:p>
-                  </a:txBody>
-                  <a:tcPr>
-                    <a:solidFill>
-                      <a:srgbClr val="1F2A44"/>
-                    </a:solidFill>
-                  </a:tcPr>
-                </a:tc>
-              </a:tr>
-              <a:tr h="600000">
-                <a:tc>
-                  <a:txBody>
-                    <a:bodyPr/>
-                    <a:lstStyle/>
-                    <a:p>
-                      <a:r>
-                        <a:rPr sz="2000" b="1">
-                          <a:solidFill>
-                            <a:srgbClr val="1F2A44"/>
-                          </a:solidFill>
-                          <a:latin typeface="Nunito Sans"/>
-                        </a:rPr>
-                        <a:t>Creer</a:t>
-                      </a:r>
-                    </a:p>
-                  </a:txBody>
-                  <a:tcPr>
-                    <a:solidFill>
-                      <a:srgbClr val="FFFFFF"/>
-                    </a:solidFill>
-                  </a:tcPr>
-                </a:tc>
-                <a:tc>
-                  <a:txBody>
-                    <a:bodyPr/>
-                    <a:lstStyle/>
-                    <a:p>
-                      <a:r>
-                        <a:rPr sz="2000" b="0">
-                          <a:solidFill>
-                            <a:srgbClr val="1F2A44"/>
-                          </a:solidFill>
-                          <a:latin typeface="Nunito Sans"/>
-                        </a:rPr>
-                        <a:t>Pensar que algo es verdad</a:t>
-                      </a:r>
-                    </a:p>
-                  </a:txBody>
-                  <a:tcPr>
-                    <a:solidFill>
-                      <a:srgbClr val="FFFFFF"/>
-                    </a:solidFill>
-                  </a:tcPr>
-                </a:tc>
-                <a:tc>
-                  <a:txBody>
-                    <a:bodyPr/>
-                    <a:lstStyle/>
-                    <a:p>
-                      <a:r>
-                        <a:rPr sz="2000" b="0">
-                          <a:solidFill>
-                            <a:srgbClr val="1F2A44"/>
-                          </a:solidFill>
-                          <a:latin typeface="Nunito Sans"/>
-                        </a:rPr>
-                        <a:t>Sí</a:t>
-                      </a:r>
-                    </a:p>
-                  </a:txBody>
-                  <a:tcPr>
-                    <a:solidFill>
-                      <a:srgbClr val="FFFFFF"/>
-                    </a:solidFill>
-                  </a:tcPr>
-                </a:tc>
-              </a:tr>
-              <a:tr h="600000">
-                <a:tc>
-                  <a:txBody>
-                    <a:bodyPr/>
-                    <a:lstStyle/>
-                    <a:p>
-                      <a:r>
-                        <a:rPr sz="2000" b="1">
-                          <a:solidFill>
-                            <a:srgbClr val="1F2A44"/>
-                          </a:solidFill>
-                          <a:latin typeface="Nunito Sans"/>
-                        </a:rPr>
-                        <a:t>Saber</a:t>
-                      </a:r>
-                    </a:p>
-                  </a:txBody>
-                  <a:tcPr>
-                    <a:solidFill>
-                      <a:srgbClr val="EAF0F7"/>
-                    </a:solidFill>
-                  </a:tcPr>
-                </a:tc>
-                <a:tc>
-                  <a:txBody>
-                    <a:bodyPr/>
-                    <a:lstStyle/>
-                    <a:p>
-                      <a:r>
-                        <a:rPr sz="2000" b="0">
-                          <a:solidFill>
-                            <a:srgbClr val="1F2A44"/>
-                          </a:solidFill>
-                          <a:latin typeface="Nunito Sans"/>
-                        </a:rPr>
-                        <a:t>Creer algo verdadero con buenas razones</a:t>
-                      </a:r>
-                    </a:p>
-                  </a:txBody>
-                  <a:tcPr>
-                    <a:solidFill>
-                      <a:srgbClr val="EAF0F7"/>
-                    </a:solidFill>
-                  </a:tcPr>
-                </a:tc>
-                <a:tc>
-                  <a:txBody>
-                    <a:bodyPr/>
-                    <a:lstStyle/>
-                    <a:p>
-                      <a:r>
-                        <a:rPr sz="2000" b="0">
-                          <a:solidFill>
-                            <a:srgbClr val="1F2A44"/>
-                          </a:solidFill>
-                          <a:latin typeface="Nunito Sans"/>
-                        </a:rPr>
-                        <a:t>No: si falla, no era saber</a:t>
-                      </a:r>
-                    </a:p>
-                  </a:txBody>
-                  <a:tcPr>
-                    <a:solidFill>
-                      <a:srgbClr val="EAF0F7"/>
-                    </a:solidFill>
-                  </a:tcPr>
-                </a:tc>
-              </a:tr>
-              <a:tr h="600000">
-                <a:tc>
-                  <a:txBody>
-                    <a:bodyPr/>
-                    <a:lstStyle/>
-                    <a:p>
-                      <a:r>
-                        <a:rPr sz="2000" b="1">
-                          <a:solidFill>
-                            <a:srgbClr val="1F2A44"/>
-                          </a:solidFill>
-                          <a:latin typeface="Nunito Sans"/>
-                        </a:rPr>
-                        <a:t>Sentirse seguro</a:t>
-                      </a:r>
-                    </a:p>
-                  </a:txBody>
-                  <a:tcPr>
-                    <a:solidFill>
-                      <a:srgbClr val="FFFFFF"/>
-                    </a:solidFill>
-                  </a:tcPr>
-                </a:tc>
-                <a:tc>
-                  <a:txBody>
-                    <a:bodyPr/>
-                    <a:lstStyle/>
-                    <a:p>
-                      <a:r>
-                        <a:rPr sz="2000" b="0">
-                          <a:solidFill>
-                            <a:srgbClr val="1F2A44"/>
-                          </a:solidFill>
-                          <a:latin typeface="Nunito Sans"/>
-                        </a:rPr>
-                        <a:t>Un sentimiento</a:t>
-                      </a:r>
-                    </a:p>
-                  </a:txBody>
-                  <a:tcPr>
-                    <a:solidFill>
-                      <a:srgbClr val="FFFFFF"/>
-                    </a:solidFill>
-                  </a:tcPr>
-                </a:tc>
-                <a:tc>
-                  <a:txBody>
-                    <a:bodyPr/>
-                    <a:lstStyle/>
-                    <a:p>
-                      <a:r>
-                        <a:rPr sz="2000" b="0">
-                          <a:solidFill>
-                            <a:srgbClr val="1F2A44"/>
-                          </a:solidFill>
-                          <a:latin typeface="Nunito Sans"/>
-                        </a:rPr>
-                        <a:t>Sí, muchas veces</a:t>
-                      </a:r>
-                    </a:p>
-                  </a:txBody>
-                  <a:tcPr>
-                    <a:solidFill>
-                      <a:srgbClr val="FFFFFF"/>
-                    </a:solidFill>
-                  </a:tcPr>
-                </a:tc>
-              </a:tr>
-            </a:tbl>
-          </a:graphicData>
-        </a:graphic>
-      </p:graphicFrame>
+              <a:t>El rey que cojeaba</a:t>
+            </a:r>
+          </a:p>
+        </p:txBody>
+      </p:sp>
     </p:spTree>
   </p:cSld>
   <p:clrMapOvr>
